--- a/.lessons/65 Backend Shipping Rule/2 Shipping Rule - Working with create page/1.pptx
+++ b/.lessons/65 Backend Shipping Rule/2 Shipping Rule - Working with create page/1.pptx
@@ -9,7 +9,27 @@
     <p:sldId id="416" r:id="rId3"/>
     <p:sldId id="417" r:id="rId4"/>
     <p:sldId id="418" r:id="rId5"/>
-    <p:sldId id="419" r:id="rId6"/>
+    <p:sldId id="420" r:id="rId6"/>
+    <p:sldId id="421" r:id="rId7"/>
+    <p:sldId id="422" r:id="rId8"/>
+    <p:sldId id="423" r:id="rId9"/>
+    <p:sldId id="424" r:id="rId10"/>
+    <p:sldId id="425" r:id="rId11"/>
+    <p:sldId id="426" r:id="rId12"/>
+    <p:sldId id="427" r:id="rId13"/>
+    <p:sldId id="428" r:id="rId14"/>
+    <p:sldId id="429" r:id="rId15"/>
+    <p:sldId id="430" r:id="rId16"/>
+    <p:sldId id="431" r:id="rId17"/>
+    <p:sldId id="432" r:id="rId18"/>
+    <p:sldId id="433" r:id="rId19"/>
+    <p:sldId id="434" r:id="rId20"/>
+    <p:sldId id="435" r:id="rId21"/>
+    <p:sldId id="436" r:id="rId22"/>
+    <p:sldId id="419" r:id="rId23"/>
+    <p:sldId id="437" r:id="rId24"/>
+    <p:sldId id="438" r:id="rId25"/>
+    <p:sldId id="439" r:id="rId26"/>
   </p:sldIdLst>
   <p:sldSz cx="12192000" cy="6858000"/>
   <p:notesSz cx="6858000" cy="9144000"/>
@@ -263,7 +283,7 @@
           <a:p>
             <a:fld id="{3E102D2E-813C-461C-9963-687A650C48C0}" type="datetimeFigureOut">
               <a:rPr lang="en-US" smtClean="0"/>
-              <a:t>12/24/2025</a:t>
+              <a:t>12/31/2025</a:t>
             </a:fld>
             <a:endParaRPr lang="en-US"/>
           </a:p>
@@ -461,7 +481,7 @@
           <a:p>
             <a:fld id="{3E102D2E-813C-461C-9963-687A650C48C0}" type="datetimeFigureOut">
               <a:rPr lang="en-US" smtClean="0"/>
-              <a:t>12/24/2025</a:t>
+              <a:t>12/31/2025</a:t>
             </a:fld>
             <a:endParaRPr lang="en-US"/>
           </a:p>
@@ -669,7 +689,7 @@
           <a:p>
             <a:fld id="{3E102D2E-813C-461C-9963-687A650C48C0}" type="datetimeFigureOut">
               <a:rPr lang="en-US" smtClean="0"/>
-              <a:t>12/24/2025</a:t>
+              <a:t>12/31/2025</a:t>
             </a:fld>
             <a:endParaRPr lang="en-US"/>
           </a:p>
@@ -867,7 +887,7 @@
           <a:p>
             <a:fld id="{3E102D2E-813C-461C-9963-687A650C48C0}" type="datetimeFigureOut">
               <a:rPr lang="en-US" smtClean="0"/>
-              <a:t>12/24/2025</a:t>
+              <a:t>12/31/2025</a:t>
             </a:fld>
             <a:endParaRPr lang="en-US"/>
           </a:p>
@@ -1142,7 +1162,7 @@
           <a:p>
             <a:fld id="{3E102D2E-813C-461C-9963-687A650C48C0}" type="datetimeFigureOut">
               <a:rPr lang="en-US" smtClean="0"/>
-              <a:t>12/24/2025</a:t>
+              <a:t>12/31/2025</a:t>
             </a:fld>
             <a:endParaRPr lang="en-US"/>
           </a:p>
@@ -1407,7 +1427,7 @@
           <a:p>
             <a:fld id="{3E102D2E-813C-461C-9963-687A650C48C0}" type="datetimeFigureOut">
               <a:rPr lang="en-US" smtClean="0"/>
-              <a:t>12/24/2025</a:t>
+              <a:t>12/31/2025</a:t>
             </a:fld>
             <a:endParaRPr lang="en-US"/>
           </a:p>
@@ -1819,7 +1839,7 @@
           <a:p>
             <a:fld id="{3E102D2E-813C-461C-9963-687A650C48C0}" type="datetimeFigureOut">
               <a:rPr lang="en-US" smtClean="0"/>
-              <a:t>12/24/2025</a:t>
+              <a:t>12/31/2025</a:t>
             </a:fld>
             <a:endParaRPr lang="en-US"/>
           </a:p>
@@ -1960,7 +1980,7 @@
           <a:p>
             <a:fld id="{3E102D2E-813C-461C-9963-687A650C48C0}" type="datetimeFigureOut">
               <a:rPr lang="en-US" smtClean="0"/>
-              <a:t>12/24/2025</a:t>
+              <a:t>12/31/2025</a:t>
             </a:fld>
             <a:endParaRPr lang="en-US"/>
           </a:p>
@@ -2073,7 +2093,7 @@
           <a:p>
             <a:fld id="{3E102D2E-813C-461C-9963-687A650C48C0}" type="datetimeFigureOut">
               <a:rPr lang="en-US" smtClean="0"/>
-              <a:t>12/24/2025</a:t>
+              <a:t>12/31/2025</a:t>
             </a:fld>
             <a:endParaRPr lang="en-US"/>
           </a:p>
@@ -2384,7 +2404,7 @@
           <a:p>
             <a:fld id="{3E102D2E-813C-461C-9963-687A650C48C0}" type="datetimeFigureOut">
               <a:rPr lang="en-US" smtClean="0"/>
-              <a:t>12/24/2025</a:t>
+              <a:t>12/31/2025</a:t>
             </a:fld>
             <a:endParaRPr lang="en-US"/>
           </a:p>
@@ -2672,7 +2692,7 @@
           <a:p>
             <a:fld id="{3E102D2E-813C-461C-9963-687A650C48C0}" type="datetimeFigureOut">
               <a:rPr lang="en-US" smtClean="0"/>
-              <a:t>12/24/2025</a:t>
+              <a:t>12/31/2025</a:t>
             </a:fld>
             <a:endParaRPr lang="en-US"/>
           </a:p>
@@ -2913,7 +2933,7 @@
           <a:p>
             <a:fld id="{3E102D2E-813C-461C-9963-687A650C48C0}" type="datetimeFigureOut">
               <a:rPr lang="en-US" smtClean="0"/>
-              <a:t>12/24/2025</a:t>
+              <a:t>12/31/2025</a:t>
             </a:fld>
             <a:endParaRPr lang="en-US"/>
           </a:p>
@@ -3386,10 +3406,1200 @@
           </a:p>
         </p:txBody>
       </p:sp>
+      <p:pic>
+        <p:nvPicPr>
+          <p:cNvPr id="4" name="Picture 3">
+            <a:extLst>
+              <a:ext uri="{FF2B5EF4-FFF2-40B4-BE49-F238E27FC236}">
+                <a16:creationId xmlns:a16="http://schemas.microsoft.com/office/drawing/2014/main" id="{0586D61D-B14D-0B3A-EBE9-674CEF14C6A6}"/>
+              </a:ext>
+            </a:extLst>
+          </p:cNvPr>
+          <p:cNvPicPr>
+            <a:picLocks noChangeAspect="1"/>
+          </p:cNvPicPr>
+          <p:nvPr/>
+        </p:nvPicPr>
+        <p:blipFill>
+          <a:blip r:embed="rId2"/>
+          <a:stretch>
+            <a:fillRect/>
+          </a:stretch>
+        </p:blipFill>
+        <p:spPr>
+          <a:xfrm>
+            <a:off x="2161082" y="0"/>
+            <a:ext cx="7869836" cy="6858000"/>
+          </a:xfrm>
+          <a:prstGeom prst="rect">
+            <a:avLst/>
+          </a:prstGeom>
+        </p:spPr>
+      </p:pic>
     </p:spTree>
     <p:extLst>
       <p:ext uri="{BB962C8B-B14F-4D97-AF65-F5344CB8AC3E}">
         <p14:creationId xmlns:p14="http://schemas.microsoft.com/office/powerpoint/2010/main" val="3737127349"/>
+      </p:ext>
+    </p:extLst>
+  </p:cSld>
+  <p:clrMapOvr>
+    <a:masterClrMapping/>
+  </p:clrMapOvr>
+</p:sld>
+</file>
+
+<file path=ppt/slides/slide10.xml><?xml version="1.0" encoding="utf-8"?>
+<p:sld xmlns:a="http://schemas.openxmlformats.org/drawingml/2006/main" xmlns:r="http://schemas.openxmlformats.org/officeDocument/2006/relationships" xmlns:p="http://schemas.openxmlformats.org/presentationml/2006/main">
+  <p:cSld>
+    <p:spTree>
+      <p:nvGrpSpPr>
+        <p:cNvPr id="1" name="">
+          <a:extLst>
+            <a:ext uri="{FF2B5EF4-FFF2-40B4-BE49-F238E27FC236}">
+              <a16:creationId xmlns:a16="http://schemas.microsoft.com/office/drawing/2014/main" id="{063AB559-84C2-361B-FDE8-2C6C13819621}"/>
+            </a:ext>
+          </a:extLst>
+        </p:cNvPr>
+        <p:cNvGrpSpPr/>
+        <p:nvPr/>
+      </p:nvGrpSpPr>
+      <p:grpSpPr>
+        <a:xfrm>
+          <a:off x="0" y="0"/>
+          <a:ext cx="0" cy="0"/>
+          <a:chOff x="0" y="0"/>
+          <a:chExt cx="0" cy="0"/>
+        </a:xfrm>
+      </p:grpSpPr>
+      <p:sp>
+        <p:nvSpPr>
+          <p:cNvPr id="3" name="TextBox 2">
+            <a:extLst>
+              <a:ext uri="{FF2B5EF4-FFF2-40B4-BE49-F238E27FC236}">
+                <a16:creationId xmlns:a16="http://schemas.microsoft.com/office/drawing/2014/main" id="{29E48738-C346-A33B-9971-5E766A93726E}"/>
+              </a:ext>
+            </a:extLst>
+          </p:cNvPr>
+          <p:cNvSpPr txBox="1"/>
+          <p:nvPr/>
+        </p:nvSpPr>
+        <p:spPr>
+          <a:xfrm>
+            <a:off x="0" y="0"/>
+            <a:ext cx="12192000" cy="355354"/>
+          </a:xfrm>
+          <a:prstGeom prst="rect">
+            <a:avLst/>
+          </a:prstGeom>
+          <a:noFill/>
+        </p:spPr>
+        <p:txBody>
+          <a:bodyPr wrap="square">
+            <a:spAutoFit/>
+          </a:bodyPr>
+          <a:lstStyle/>
+          <a:p>
+            <a:pPr>
+              <a:lnSpc>
+                <a:spcPct val="150000"/>
+              </a:lnSpc>
+              <a:buNone/>
+            </a:pPr>
+            <a:r>
+              <a:rPr kumimoji="0" lang="en-US" altLang="en-US" sz="1300" b="0" i="0" u="none" strike="noStrike" cap="none" normalizeH="0" baseline="0">
+                <a:ln>
+                  <a:noFill/>
+                </a:ln>
+                <a:solidFill>
+                  <a:schemeClr val="tx1"/>
+                </a:solidFill>
+                <a:effectLst/>
+                <a:latin typeface="Arial" panose="020B0604020202020204" pitchFamily="34" charset="0"/>
+              </a:rPr>
+              <a:t>.</a:t>
+            </a:r>
+          </a:p>
+        </p:txBody>
+      </p:sp>
+      <p:pic>
+        <p:nvPicPr>
+          <p:cNvPr id="4" name="Picture 3">
+            <a:extLst>
+              <a:ext uri="{FF2B5EF4-FFF2-40B4-BE49-F238E27FC236}">
+                <a16:creationId xmlns:a16="http://schemas.microsoft.com/office/drawing/2014/main" id="{47D5DC0D-46F4-E4EE-8EE5-76927235A264}"/>
+              </a:ext>
+            </a:extLst>
+          </p:cNvPr>
+          <p:cNvPicPr>
+            <a:picLocks noChangeAspect="1"/>
+          </p:cNvPicPr>
+          <p:nvPr/>
+        </p:nvPicPr>
+        <p:blipFill>
+          <a:blip r:embed="rId2"/>
+          <a:stretch>
+            <a:fillRect/>
+          </a:stretch>
+        </p:blipFill>
+        <p:spPr>
+          <a:xfrm>
+            <a:off x="1156691" y="0"/>
+            <a:ext cx="9878618" cy="6858000"/>
+          </a:xfrm>
+          <a:prstGeom prst="rect">
+            <a:avLst/>
+          </a:prstGeom>
+        </p:spPr>
+      </p:pic>
+    </p:spTree>
+    <p:extLst>
+      <p:ext uri="{BB962C8B-B14F-4D97-AF65-F5344CB8AC3E}">
+        <p14:creationId xmlns:p14="http://schemas.microsoft.com/office/powerpoint/2010/main" val="518198702"/>
+      </p:ext>
+    </p:extLst>
+  </p:cSld>
+  <p:clrMapOvr>
+    <a:masterClrMapping/>
+  </p:clrMapOvr>
+</p:sld>
+</file>
+
+<file path=ppt/slides/slide11.xml><?xml version="1.0" encoding="utf-8"?>
+<p:sld xmlns:a="http://schemas.openxmlformats.org/drawingml/2006/main" xmlns:r="http://schemas.openxmlformats.org/officeDocument/2006/relationships" xmlns:p="http://schemas.openxmlformats.org/presentationml/2006/main">
+  <p:cSld>
+    <p:spTree>
+      <p:nvGrpSpPr>
+        <p:cNvPr id="1" name="">
+          <a:extLst>
+            <a:ext uri="{FF2B5EF4-FFF2-40B4-BE49-F238E27FC236}">
+              <a16:creationId xmlns:a16="http://schemas.microsoft.com/office/drawing/2014/main" id="{FA696793-90D4-B7B9-66CE-3FFF8E9B5F49}"/>
+            </a:ext>
+          </a:extLst>
+        </p:cNvPr>
+        <p:cNvGrpSpPr/>
+        <p:nvPr/>
+      </p:nvGrpSpPr>
+      <p:grpSpPr>
+        <a:xfrm>
+          <a:off x="0" y="0"/>
+          <a:ext cx="0" cy="0"/>
+          <a:chOff x="0" y="0"/>
+          <a:chExt cx="0" cy="0"/>
+        </a:xfrm>
+      </p:grpSpPr>
+      <p:sp>
+        <p:nvSpPr>
+          <p:cNvPr id="3" name="TextBox 2">
+            <a:extLst>
+              <a:ext uri="{FF2B5EF4-FFF2-40B4-BE49-F238E27FC236}">
+                <a16:creationId xmlns:a16="http://schemas.microsoft.com/office/drawing/2014/main" id="{15F3FD62-A3EC-69EE-9B57-E02713647824}"/>
+              </a:ext>
+            </a:extLst>
+          </p:cNvPr>
+          <p:cNvSpPr txBox="1"/>
+          <p:nvPr/>
+        </p:nvSpPr>
+        <p:spPr>
+          <a:xfrm>
+            <a:off x="0" y="0"/>
+            <a:ext cx="12192000" cy="355354"/>
+          </a:xfrm>
+          <a:prstGeom prst="rect">
+            <a:avLst/>
+          </a:prstGeom>
+          <a:noFill/>
+        </p:spPr>
+        <p:txBody>
+          <a:bodyPr wrap="square">
+            <a:spAutoFit/>
+          </a:bodyPr>
+          <a:lstStyle/>
+          <a:p>
+            <a:pPr>
+              <a:lnSpc>
+                <a:spcPct val="150000"/>
+              </a:lnSpc>
+              <a:buNone/>
+            </a:pPr>
+            <a:r>
+              <a:rPr kumimoji="0" lang="en-US" altLang="en-US" sz="1300" b="0" i="0" u="none" strike="noStrike" cap="none" normalizeH="0" baseline="0">
+                <a:ln>
+                  <a:noFill/>
+                </a:ln>
+                <a:solidFill>
+                  <a:schemeClr val="tx1"/>
+                </a:solidFill>
+                <a:effectLst/>
+                <a:latin typeface="Arial" panose="020B0604020202020204" pitchFamily="34" charset="0"/>
+              </a:rPr>
+              <a:t>.</a:t>
+            </a:r>
+          </a:p>
+        </p:txBody>
+      </p:sp>
+      <p:pic>
+        <p:nvPicPr>
+          <p:cNvPr id="4" name="Picture 3">
+            <a:extLst>
+              <a:ext uri="{FF2B5EF4-FFF2-40B4-BE49-F238E27FC236}">
+                <a16:creationId xmlns:a16="http://schemas.microsoft.com/office/drawing/2014/main" id="{F02055D4-C345-7AF9-2D6B-1FCFD46CCBCC}"/>
+              </a:ext>
+            </a:extLst>
+          </p:cNvPr>
+          <p:cNvPicPr>
+            <a:picLocks noChangeAspect="1"/>
+          </p:cNvPicPr>
+          <p:nvPr/>
+        </p:nvPicPr>
+        <p:blipFill>
+          <a:blip r:embed="rId2"/>
+          <a:stretch>
+            <a:fillRect/>
+          </a:stretch>
+        </p:blipFill>
+        <p:spPr>
+          <a:xfrm>
+            <a:off x="3226765" y="0"/>
+            <a:ext cx="5738470" cy="6858000"/>
+          </a:xfrm>
+          <a:prstGeom prst="rect">
+            <a:avLst/>
+          </a:prstGeom>
+        </p:spPr>
+      </p:pic>
+    </p:spTree>
+    <p:extLst>
+      <p:ext uri="{BB962C8B-B14F-4D97-AF65-F5344CB8AC3E}">
+        <p14:creationId xmlns:p14="http://schemas.microsoft.com/office/powerpoint/2010/main" val="4049561306"/>
+      </p:ext>
+    </p:extLst>
+  </p:cSld>
+  <p:clrMapOvr>
+    <a:masterClrMapping/>
+  </p:clrMapOvr>
+</p:sld>
+</file>
+
+<file path=ppt/slides/slide12.xml><?xml version="1.0" encoding="utf-8"?>
+<p:sld xmlns:a="http://schemas.openxmlformats.org/drawingml/2006/main" xmlns:r="http://schemas.openxmlformats.org/officeDocument/2006/relationships" xmlns:p="http://schemas.openxmlformats.org/presentationml/2006/main">
+  <p:cSld>
+    <p:spTree>
+      <p:nvGrpSpPr>
+        <p:cNvPr id="1" name="">
+          <a:extLst>
+            <a:ext uri="{FF2B5EF4-FFF2-40B4-BE49-F238E27FC236}">
+              <a16:creationId xmlns:a16="http://schemas.microsoft.com/office/drawing/2014/main" id="{A98AF6D2-269C-D731-CC5B-0EE5248CC70A}"/>
+            </a:ext>
+          </a:extLst>
+        </p:cNvPr>
+        <p:cNvGrpSpPr/>
+        <p:nvPr/>
+      </p:nvGrpSpPr>
+      <p:grpSpPr>
+        <a:xfrm>
+          <a:off x="0" y="0"/>
+          <a:ext cx="0" cy="0"/>
+          <a:chOff x="0" y="0"/>
+          <a:chExt cx="0" cy="0"/>
+        </a:xfrm>
+      </p:grpSpPr>
+      <p:sp>
+        <p:nvSpPr>
+          <p:cNvPr id="3" name="TextBox 2">
+            <a:extLst>
+              <a:ext uri="{FF2B5EF4-FFF2-40B4-BE49-F238E27FC236}">
+                <a16:creationId xmlns:a16="http://schemas.microsoft.com/office/drawing/2014/main" id="{7458AAE7-C7AF-B90C-21D7-F0F382543E38}"/>
+              </a:ext>
+            </a:extLst>
+          </p:cNvPr>
+          <p:cNvSpPr txBox="1"/>
+          <p:nvPr/>
+        </p:nvSpPr>
+        <p:spPr>
+          <a:xfrm>
+            <a:off x="0" y="0"/>
+            <a:ext cx="12192000" cy="355354"/>
+          </a:xfrm>
+          <a:prstGeom prst="rect">
+            <a:avLst/>
+          </a:prstGeom>
+          <a:noFill/>
+        </p:spPr>
+        <p:txBody>
+          <a:bodyPr wrap="square">
+            <a:spAutoFit/>
+          </a:bodyPr>
+          <a:lstStyle/>
+          <a:p>
+            <a:pPr>
+              <a:lnSpc>
+                <a:spcPct val="150000"/>
+              </a:lnSpc>
+              <a:buNone/>
+            </a:pPr>
+            <a:r>
+              <a:rPr kumimoji="0" lang="en-US" altLang="en-US" sz="1300" b="0" i="0" u="none" strike="noStrike" cap="none" normalizeH="0" baseline="0">
+                <a:ln>
+                  <a:noFill/>
+                </a:ln>
+                <a:solidFill>
+                  <a:schemeClr val="tx1"/>
+                </a:solidFill>
+                <a:effectLst/>
+                <a:latin typeface="Arial" panose="020B0604020202020204" pitchFamily="34" charset="0"/>
+              </a:rPr>
+              <a:t>.</a:t>
+            </a:r>
+          </a:p>
+        </p:txBody>
+      </p:sp>
+      <p:pic>
+        <p:nvPicPr>
+          <p:cNvPr id="4" name="Picture 3">
+            <a:extLst>
+              <a:ext uri="{FF2B5EF4-FFF2-40B4-BE49-F238E27FC236}">
+                <a16:creationId xmlns:a16="http://schemas.microsoft.com/office/drawing/2014/main" id="{D315E515-C816-04B1-E527-9916B7BF0CF3}"/>
+              </a:ext>
+            </a:extLst>
+          </p:cNvPr>
+          <p:cNvPicPr>
+            <a:picLocks noChangeAspect="1"/>
+          </p:cNvPicPr>
+          <p:nvPr/>
+        </p:nvPicPr>
+        <p:blipFill>
+          <a:blip r:embed="rId2"/>
+          <a:stretch>
+            <a:fillRect/>
+          </a:stretch>
+        </p:blipFill>
+        <p:spPr>
+          <a:xfrm>
+            <a:off x="2457134" y="0"/>
+            <a:ext cx="7277732" cy="6858000"/>
+          </a:xfrm>
+          <a:prstGeom prst="rect">
+            <a:avLst/>
+          </a:prstGeom>
+        </p:spPr>
+      </p:pic>
+    </p:spTree>
+    <p:extLst>
+      <p:ext uri="{BB962C8B-B14F-4D97-AF65-F5344CB8AC3E}">
+        <p14:creationId xmlns:p14="http://schemas.microsoft.com/office/powerpoint/2010/main" val="936329426"/>
+      </p:ext>
+    </p:extLst>
+  </p:cSld>
+  <p:clrMapOvr>
+    <a:masterClrMapping/>
+  </p:clrMapOvr>
+</p:sld>
+</file>
+
+<file path=ppt/slides/slide13.xml><?xml version="1.0" encoding="utf-8"?>
+<p:sld xmlns:a="http://schemas.openxmlformats.org/drawingml/2006/main" xmlns:r="http://schemas.openxmlformats.org/officeDocument/2006/relationships" xmlns:p="http://schemas.openxmlformats.org/presentationml/2006/main">
+  <p:cSld>
+    <p:spTree>
+      <p:nvGrpSpPr>
+        <p:cNvPr id="1" name="">
+          <a:extLst>
+            <a:ext uri="{FF2B5EF4-FFF2-40B4-BE49-F238E27FC236}">
+              <a16:creationId xmlns:a16="http://schemas.microsoft.com/office/drawing/2014/main" id="{B94226DD-6084-7BE1-DD90-D6DB98A33D4E}"/>
+            </a:ext>
+          </a:extLst>
+        </p:cNvPr>
+        <p:cNvGrpSpPr/>
+        <p:nvPr/>
+      </p:nvGrpSpPr>
+      <p:grpSpPr>
+        <a:xfrm>
+          <a:off x="0" y="0"/>
+          <a:ext cx="0" cy="0"/>
+          <a:chOff x="0" y="0"/>
+          <a:chExt cx="0" cy="0"/>
+        </a:xfrm>
+      </p:grpSpPr>
+      <p:sp>
+        <p:nvSpPr>
+          <p:cNvPr id="3" name="TextBox 2">
+            <a:extLst>
+              <a:ext uri="{FF2B5EF4-FFF2-40B4-BE49-F238E27FC236}">
+                <a16:creationId xmlns:a16="http://schemas.microsoft.com/office/drawing/2014/main" id="{59D85C35-FE9F-BC00-23A5-ADE2FDCA84CE}"/>
+              </a:ext>
+            </a:extLst>
+          </p:cNvPr>
+          <p:cNvSpPr txBox="1"/>
+          <p:nvPr/>
+        </p:nvSpPr>
+        <p:spPr>
+          <a:xfrm>
+            <a:off x="0" y="0"/>
+            <a:ext cx="12192000" cy="355354"/>
+          </a:xfrm>
+          <a:prstGeom prst="rect">
+            <a:avLst/>
+          </a:prstGeom>
+          <a:noFill/>
+        </p:spPr>
+        <p:txBody>
+          <a:bodyPr wrap="square">
+            <a:spAutoFit/>
+          </a:bodyPr>
+          <a:lstStyle/>
+          <a:p>
+            <a:pPr>
+              <a:lnSpc>
+                <a:spcPct val="150000"/>
+              </a:lnSpc>
+              <a:buNone/>
+            </a:pPr>
+            <a:r>
+              <a:rPr kumimoji="0" lang="en-US" altLang="en-US" sz="1300" b="0" i="0" u="none" strike="noStrike" cap="none" normalizeH="0" baseline="0">
+                <a:ln>
+                  <a:noFill/>
+                </a:ln>
+                <a:solidFill>
+                  <a:schemeClr val="tx1"/>
+                </a:solidFill>
+                <a:effectLst/>
+                <a:latin typeface="Arial" panose="020B0604020202020204" pitchFamily="34" charset="0"/>
+              </a:rPr>
+              <a:t>.</a:t>
+            </a:r>
+          </a:p>
+        </p:txBody>
+      </p:sp>
+      <p:pic>
+        <p:nvPicPr>
+          <p:cNvPr id="4" name="Picture 3">
+            <a:extLst>
+              <a:ext uri="{FF2B5EF4-FFF2-40B4-BE49-F238E27FC236}">
+                <a16:creationId xmlns:a16="http://schemas.microsoft.com/office/drawing/2014/main" id="{34C39B15-CDB1-BF3F-A96C-A58B64E48A9E}"/>
+              </a:ext>
+            </a:extLst>
+          </p:cNvPr>
+          <p:cNvPicPr>
+            <a:picLocks noChangeAspect="1"/>
+          </p:cNvPicPr>
+          <p:nvPr/>
+        </p:nvPicPr>
+        <p:blipFill>
+          <a:blip r:embed="rId2"/>
+          <a:stretch>
+            <a:fillRect/>
+          </a:stretch>
+        </p:blipFill>
+        <p:spPr>
+          <a:xfrm>
+            <a:off x="2656492" y="0"/>
+            <a:ext cx="6879015" cy="6858000"/>
+          </a:xfrm>
+          <a:prstGeom prst="rect">
+            <a:avLst/>
+          </a:prstGeom>
+        </p:spPr>
+      </p:pic>
+    </p:spTree>
+    <p:extLst>
+      <p:ext uri="{BB962C8B-B14F-4D97-AF65-F5344CB8AC3E}">
+        <p14:creationId xmlns:p14="http://schemas.microsoft.com/office/powerpoint/2010/main" val="340060334"/>
+      </p:ext>
+    </p:extLst>
+  </p:cSld>
+  <p:clrMapOvr>
+    <a:masterClrMapping/>
+  </p:clrMapOvr>
+</p:sld>
+</file>
+
+<file path=ppt/slides/slide14.xml><?xml version="1.0" encoding="utf-8"?>
+<p:sld xmlns:a="http://schemas.openxmlformats.org/drawingml/2006/main" xmlns:r="http://schemas.openxmlformats.org/officeDocument/2006/relationships" xmlns:p="http://schemas.openxmlformats.org/presentationml/2006/main">
+  <p:cSld>
+    <p:spTree>
+      <p:nvGrpSpPr>
+        <p:cNvPr id="1" name="">
+          <a:extLst>
+            <a:ext uri="{FF2B5EF4-FFF2-40B4-BE49-F238E27FC236}">
+              <a16:creationId xmlns:a16="http://schemas.microsoft.com/office/drawing/2014/main" id="{97976BA2-42FA-BD19-9338-A5CA28981D39}"/>
+            </a:ext>
+          </a:extLst>
+        </p:cNvPr>
+        <p:cNvGrpSpPr/>
+        <p:nvPr/>
+      </p:nvGrpSpPr>
+      <p:grpSpPr>
+        <a:xfrm>
+          <a:off x="0" y="0"/>
+          <a:ext cx="0" cy="0"/>
+          <a:chOff x="0" y="0"/>
+          <a:chExt cx="0" cy="0"/>
+        </a:xfrm>
+      </p:grpSpPr>
+      <p:sp>
+        <p:nvSpPr>
+          <p:cNvPr id="3" name="TextBox 2">
+            <a:extLst>
+              <a:ext uri="{FF2B5EF4-FFF2-40B4-BE49-F238E27FC236}">
+                <a16:creationId xmlns:a16="http://schemas.microsoft.com/office/drawing/2014/main" id="{3058DC71-AF40-2D54-3D62-9EAA657E9E15}"/>
+              </a:ext>
+            </a:extLst>
+          </p:cNvPr>
+          <p:cNvSpPr txBox="1"/>
+          <p:nvPr/>
+        </p:nvSpPr>
+        <p:spPr>
+          <a:xfrm>
+            <a:off x="0" y="0"/>
+            <a:ext cx="12192000" cy="355354"/>
+          </a:xfrm>
+          <a:prstGeom prst="rect">
+            <a:avLst/>
+          </a:prstGeom>
+          <a:noFill/>
+        </p:spPr>
+        <p:txBody>
+          <a:bodyPr wrap="square">
+            <a:spAutoFit/>
+          </a:bodyPr>
+          <a:lstStyle/>
+          <a:p>
+            <a:pPr>
+              <a:lnSpc>
+                <a:spcPct val="150000"/>
+              </a:lnSpc>
+              <a:buNone/>
+            </a:pPr>
+            <a:r>
+              <a:rPr kumimoji="0" lang="en-US" altLang="en-US" sz="1300" b="0" i="0" u="none" strike="noStrike" cap="none" normalizeH="0" baseline="0">
+                <a:ln>
+                  <a:noFill/>
+                </a:ln>
+                <a:solidFill>
+                  <a:schemeClr val="tx1"/>
+                </a:solidFill>
+                <a:effectLst/>
+                <a:latin typeface="Arial" panose="020B0604020202020204" pitchFamily="34" charset="0"/>
+              </a:rPr>
+              <a:t>.</a:t>
+            </a:r>
+          </a:p>
+        </p:txBody>
+      </p:sp>
+      <p:pic>
+        <p:nvPicPr>
+          <p:cNvPr id="4" name="Picture 3">
+            <a:extLst>
+              <a:ext uri="{FF2B5EF4-FFF2-40B4-BE49-F238E27FC236}">
+                <a16:creationId xmlns:a16="http://schemas.microsoft.com/office/drawing/2014/main" id="{9686F35E-4C66-4B74-E073-4C3A54A0041E}"/>
+              </a:ext>
+            </a:extLst>
+          </p:cNvPr>
+          <p:cNvPicPr>
+            <a:picLocks noChangeAspect="1"/>
+          </p:cNvPicPr>
+          <p:nvPr/>
+        </p:nvPicPr>
+        <p:blipFill>
+          <a:blip r:embed="rId2"/>
+          <a:stretch>
+            <a:fillRect/>
+          </a:stretch>
+        </p:blipFill>
+        <p:spPr>
+          <a:xfrm>
+            <a:off x="2579257" y="0"/>
+            <a:ext cx="7033486" cy="6858000"/>
+          </a:xfrm>
+          <a:prstGeom prst="rect">
+            <a:avLst/>
+          </a:prstGeom>
+        </p:spPr>
+      </p:pic>
+    </p:spTree>
+    <p:extLst>
+      <p:ext uri="{BB962C8B-B14F-4D97-AF65-F5344CB8AC3E}">
+        <p14:creationId xmlns:p14="http://schemas.microsoft.com/office/powerpoint/2010/main" val="427588575"/>
+      </p:ext>
+    </p:extLst>
+  </p:cSld>
+  <p:clrMapOvr>
+    <a:masterClrMapping/>
+  </p:clrMapOvr>
+</p:sld>
+</file>
+
+<file path=ppt/slides/slide15.xml><?xml version="1.0" encoding="utf-8"?>
+<p:sld xmlns:a="http://schemas.openxmlformats.org/drawingml/2006/main" xmlns:r="http://schemas.openxmlformats.org/officeDocument/2006/relationships" xmlns:p="http://schemas.openxmlformats.org/presentationml/2006/main">
+  <p:cSld>
+    <p:spTree>
+      <p:nvGrpSpPr>
+        <p:cNvPr id="1" name="">
+          <a:extLst>
+            <a:ext uri="{FF2B5EF4-FFF2-40B4-BE49-F238E27FC236}">
+              <a16:creationId xmlns:a16="http://schemas.microsoft.com/office/drawing/2014/main" id="{5D4A6BA8-1D49-DA6D-D5E1-51EF909BAEE9}"/>
+            </a:ext>
+          </a:extLst>
+        </p:cNvPr>
+        <p:cNvGrpSpPr/>
+        <p:nvPr/>
+      </p:nvGrpSpPr>
+      <p:grpSpPr>
+        <a:xfrm>
+          <a:off x="0" y="0"/>
+          <a:ext cx="0" cy="0"/>
+          <a:chOff x="0" y="0"/>
+          <a:chExt cx="0" cy="0"/>
+        </a:xfrm>
+      </p:grpSpPr>
+      <p:sp>
+        <p:nvSpPr>
+          <p:cNvPr id="3" name="TextBox 2">
+            <a:extLst>
+              <a:ext uri="{FF2B5EF4-FFF2-40B4-BE49-F238E27FC236}">
+                <a16:creationId xmlns:a16="http://schemas.microsoft.com/office/drawing/2014/main" id="{07C4B257-53C4-416B-CF9B-AAC6AC38C7F7}"/>
+              </a:ext>
+            </a:extLst>
+          </p:cNvPr>
+          <p:cNvSpPr txBox="1"/>
+          <p:nvPr/>
+        </p:nvSpPr>
+        <p:spPr>
+          <a:xfrm>
+            <a:off x="0" y="0"/>
+            <a:ext cx="12192000" cy="355354"/>
+          </a:xfrm>
+          <a:prstGeom prst="rect">
+            <a:avLst/>
+          </a:prstGeom>
+          <a:noFill/>
+        </p:spPr>
+        <p:txBody>
+          <a:bodyPr wrap="square">
+            <a:spAutoFit/>
+          </a:bodyPr>
+          <a:lstStyle/>
+          <a:p>
+            <a:pPr>
+              <a:lnSpc>
+                <a:spcPct val="150000"/>
+              </a:lnSpc>
+              <a:buNone/>
+            </a:pPr>
+            <a:r>
+              <a:rPr kumimoji="0" lang="en-US" altLang="en-US" sz="1300" b="0" i="0" u="none" strike="noStrike" cap="none" normalizeH="0" baseline="0">
+                <a:ln>
+                  <a:noFill/>
+                </a:ln>
+                <a:solidFill>
+                  <a:schemeClr val="tx1"/>
+                </a:solidFill>
+                <a:effectLst/>
+                <a:latin typeface="Arial" panose="020B0604020202020204" pitchFamily="34" charset="0"/>
+              </a:rPr>
+              <a:t>.</a:t>
+            </a:r>
+          </a:p>
+        </p:txBody>
+      </p:sp>
+      <p:pic>
+        <p:nvPicPr>
+          <p:cNvPr id="4" name="Picture 3">
+            <a:extLst>
+              <a:ext uri="{FF2B5EF4-FFF2-40B4-BE49-F238E27FC236}">
+                <a16:creationId xmlns:a16="http://schemas.microsoft.com/office/drawing/2014/main" id="{27800050-A5F3-0C69-14CE-0D2754A9FB52}"/>
+              </a:ext>
+            </a:extLst>
+          </p:cNvPr>
+          <p:cNvPicPr>
+            <a:picLocks noChangeAspect="1"/>
+          </p:cNvPicPr>
+          <p:nvPr/>
+        </p:nvPicPr>
+        <p:blipFill>
+          <a:blip r:embed="rId2"/>
+          <a:stretch>
+            <a:fillRect/>
+          </a:stretch>
+        </p:blipFill>
+        <p:spPr>
+          <a:xfrm>
+            <a:off x="0" y="124184"/>
+            <a:ext cx="12192000" cy="6609632"/>
+          </a:xfrm>
+          <a:prstGeom prst="rect">
+            <a:avLst/>
+          </a:prstGeom>
+        </p:spPr>
+      </p:pic>
+    </p:spTree>
+    <p:extLst>
+      <p:ext uri="{BB962C8B-B14F-4D97-AF65-F5344CB8AC3E}">
+        <p14:creationId xmlns:p14="http://schemas.microsoft.com/office/powerpoint/2010/main" val="157998967"/>
+      </p:ext>
+    </p:extLst>
+  </p:cSld>
+  <p:clrMapOvr>
+    <a:masterClrMapping/>
+  </p:clrMapOvr>
+</p:sld>
+</file>
+
+<file path=ppt/slides/slide16.xml><?xml version="1.0" encoding="utf-8"?>
+<p:sld xmlns:a="http://schemas.openxmlformats.org/drawingml/2006/main" xmlns:r="http://schemas.openxmlformats.org/officeDocument/2006/relationships" xmlns:p="http://schemas.openxmlformats.org/presentationml/2006/main">
+  <p:cSld>
+    <p:spTree>
+      <p:nvGrpSpPr>
+        <p:cNvPr id="1" name="">
+          <a:extLst>
+            <a:ext uri="{FF2B5EF4-FFF2-40B4-BE49-F238E27FC236}">
+              <a16:creationId xmlns:a16="http://schemas.microsoft.com/office/drawing/2014/main" id="{C31CE146-3CF6-CD16-03D1-5BB27A8D60D1}"/>
+            </a:ext>
+          </a:extLst>
+        </p:cNvPr>
+        <p:cNvGrpSpPr/>
+        <p:nvPr/>
+      </p:nvGrpSpPr>
+      <p:grpSpPr>
+        <a:xfrm>
+          <a:off x="0" y="0"/>
+          <a:ext cx="0" cy="0"/>
+          <a:chOff x="0" y="0"/>
+          <a:chExt cx="0" cy="0"/>
+        </a:xfrm>
+      </p:grpSpPr>
+      <p:sp>
+        <p:nvSpPr>
+          <p:cNvPr id="3" name="TextBox 2">
+            <a:extLst>
+              <a:ext uri="{FF2B5EF4-FFF2-40B4-BE49-F238E27FC236}">
+                <a16:creationId xmlns:a16="http://schemas.microsoft.com/office/drawing/2014/main" id="{885D8136-7071-D026-ACD7-BA48719334F9}"/>
+              </a:ext>
+            </a:extLst>
+          </p:cNvPr>
+          <p:cNvSpPr txBox="1"/>
+          <p:nvPr/>
+        </p:nvSpPr>
+        <p:spPr>
+          <a:xfrm>
+            <a:off x="0" y="0"/>
+            <a:ext cx="12192000" cy="355354"/>
+          </a:xfrm>
+          <a:prstGeom prst="rect">
+            <a:avLst/>
+          </a:prstGeom>
+          <a:noFill/>
+        </p:spPr>
+        <p:txBody>
+          <a:bodyPr wrap="square">
+            <a:spAutoFit/>
+          </a:bodyPr>
+          <a:lstStyle/>
+          <a:p>
+            <a:pPr>
+              <a:lnSpc>
+                <a:spcPct val="150000"/>
+              </a:lnSpc>
+              <a:buNone/>
+            </a:pPr>
+            <a:r>
+              <a:rPr kumimoji="0" lang="en-US" altLang="en-US" sz="1300" b="0" i="0" u="none" strike="noStrike" cap="none" normalizeH="0" baseline="0">
+                <a:ln>
+                  <a:noFill/>
+                </a:ln>
+                <a:solidFill>
+                  <a:schemeClr val="tx1"/>
+                </a:solidFill>
+                <a:effectLst/>
+                <a:latin typeface="Arial" panose="020B0604020202020204" pitchFamily="34" charset="0"/>
+              </a:rPr>
+              <a:t>.</a:t>
+            </a:r>
+          </a:p>
+        </p:txBody>
+      </p:sp>
+      <p:pic>
+        <p:nvPicPr>
+          <p:cNvPr id="4" name="Picture 3">
+            <a:extLst>
+              <a:ext uri="{FF2B5EF4-FFF2-40B4-BE49-F238E27FC236}">
+                <a16:creationId xmlns:a16="http://schemas.microsoft.com/office/drawing/2014/main" id="{1A805F87-149E-4B15-9076-396C0FFAD921}"/>
+              </a:ext>
+            </a:extLst>
+          </p:cNvPr>
+          <p:cNvPicPr>
+            <a:picLocks noChangeAspect="1"/>
+          </p:cNvPicPr>
+          <p:nvPr/>
+        </p:nvPicPr>
+        <p:blipFill>
+          <a:blip r:embed="rId2"/>
+          <a:stretch>
+            <a:fillRect/>
+          </a:stretch>
+        </p:blipFill>
+        <p:spPr>
+          <a:xfrm>
+            <a:off x="370416" y="0"/>
+            <a:ext cx="11451167" cy="6858000"/>
+          </a:xfrm>
+          <a:prstGeom prst="rect">
+            <a:avLst/>
+          </a:prstGeom>
+        </p:spPr>
+      </p:pic>
+    </p:spTree>
+    <p:extLst>
+      <p:ext uri="{BB962C8B-B14F-4D97-AF65-F5344CB8AC3E}">
+        <p14:creationId xmlns:p14="http://schemas.microsoft.com/office/powerpoint/2010/main" val="1782104417"/>
+      </p:ext>
+    </p:extLst>
+  </p:cSld>
+  <p:clrMapOvr>
+    <a:masterClrMapping/>
+  </p:clrMapOvr>
+</p:sld>
+</file>
+
+<file path=ppt/slides/slide17.xml><?xml version="1.0" encoding="utf-8"?>
+<p:sld xmlns:a="http://schemas.openxmlformats.org/drawingml/2006/main" xmlns:r="http://schemas.openxmlformats.org/officeDocument/2006/relationships" xmlns:p="http://schemas.openxmlformats.org/presentationml/2006/main">
+  <p:cSld>
+    <p:spTree>
+      <p:nvGrpSpPr>
+        <p:cNvPr id="1" name="">
+          <a:extLst>
+            <a:ext uri="{FF2B5EF4-FFF2-40B4-BE49-F238E27FC236}">
+              <a16:creationId xmlns:a16="http://schemas.microsoft.com/office/drawing/2014/main" id="{32BF5745-6588-A95B-6443-156C29056707}"/>
+            </a:ext>
+          </a:extLst>
+        </p:cNvPr>
+        <p:cNvGrpSpPr/>
+        <p:nvPr/>
+      </p:nvGrpSpPr>
+      <p:grpSpPr>
+        <a:xfrm>
+          <a:off x="0" y="0"/>
+          <a:ext cx="0" cy="0"/>
+          <a:chOff x="0" y="0"/>
+          <a:chExt cx="0" cy="0"/>
+        </a:xfrm>
+      </p:grpSpPr>
+      <p:sp>
+        <p:nvSpPr>
+          <p:cNvPr id="3" name="TextBox 2">
+            <a:extLst>
+              <a:ext uri="{FF2B5EF4-FFF2-40B4-BE49-F238E27FC236}">
+                <a16:creationId xmlns:a16="http://schemas.microsoft.com/office/drawing/2014/main" id="{85ACAF5E-F179-D79E-270C-EBCD71D4845B}"/>
+              </a:ext>
+            </a:extLst>
+          </p:cNvPr>
+          <p:cNvSpPr txBox="1"/>
+          <p:nvPr/>
+        </p:nvSpPr>
+        <p:spPr>
+          <a:xfrm>
+            <a:off x="0" y="0"/>
+            <a:ext cx="12192000" cy="355354"/>
+          </a:xfrm>
+          <a:prstGeom prst="rect">
+            <a:avLst/>
+          </a:prstGeom>
+          <a:noFill/>
+        </p:spPr>
+        <p:txBody>
+          <a:bodyPr wrap="square">
+            <a:spAutoFit/>
+          </a:bodyPr>
+          <a:lstStyle/>
+          <a:p>
+            <a:pPr>
+              <a:lnSpc>
+                <a:spcPct val="150000"/>
+              </a:lnSpc>
+              <a:buNone/>
+            </a:pPr>
+            <a:r>
+              <a:rPr kumimoji="0" lang="en-US" altLang="en-US" sz="1300" b="0" i="0" u="none" strike="noStrike" cap="none" normalizeH="0" baseline="0">
+                <a:ln>
+                  <a:noFill/>
+                </a:ln>
+                <a:solidFill>
+                  <a:schemeClr val="tx1"/>
+                </a:solidFill>
+                <a:effectLst/>
+                <a:latin typeface="Arial" panose="020B0604020202020204" pitchFamily="34" charset="0"/>
+              </a:rPr>
+              <a:t>.</a:t>
+            </a:r>
+          </a:p>
+        </p:txBody>
+      </p:sp>
+      <p:pic>
+        <p:nvPicPr>
+          <p:cNvPr id="4" name="Picture 3">
+            <a:extLst>
+              <a:ext uri="{FF2B5EF4-FFF2-40B4-BE49-F238E27FC236}">
+                <a16:creationId xmlns:a16="http://schemas.microsoft.com/office/drawing/2014/main" id="{BAE60B58-E945-544A-90BC-A67F3F54EED2}"/>
+              </a:ext>
+            </a:extLst>
+          </p:cNvPr>
+          <p:cNvPicPr>
+            <a:picLocks noChangeAspect="1"/>
+          </p:cNvPicPr>
+          <p:nvPr/>
+        </p:nvPicPr>
+        <p:blipFill>
+          <a:blip r:embed="rId2"/>
+          <a:stretch>
+            <a:fillRect/>
+          </a:stretch>
+        </p:blipFill>
+        <p:spPr>
+          <a:xfrm>
+            <a:off x="2190750" y="0"/>
+            <a:ext cx="7810500" cy="6858000"/>
+          </a:xfrm>
+          <a:prstGeom prst="rect">
+            <a:avLst/>
+          </a:prstGeom>
+        </p:spPr>
+      </p:pic>
+    </p:spTree>
+    <p:extLst>
+      <p:ext uri="{BB962C8B-B14F-4D97-AF65-F5344CB8AC3E}">
+        <p14:creationId xmlns:p14="http://schemas.microsoft.com/office/powerpoint/2010/main" val="3889875145"/>
+      </p:ext>
+    </p:extLst>
+  </p:cSld>
+  <p:clrMapOvr>
+    <a:masterClrMapping/>
+  </p:clrMapOvr>
+</p:sld>
+</file>
+
+<file path=ppt/slides/slide18.xml><?xml version="1.0" encoding="utf-8"?>
+<p:sld xmlns:a="http://schemas.openxmlformats.org/drawingml/2006/main" xmlns:r="http://schemas.openxmlformats.org/officeDocument/2006/relationships" xmlns:p="http://schemas.openxmlformats.org/presentationml/2006/main">
+  <p:cSld>
+    <p:spTree>
+      <p:nvGrpSpPr>
+        <p:cNvPr id="1" name="">
+          <a:extLst>
+            <a:ext uri="{FF2B5EF4-FFF2-40B4-BE49-F238E27FC236}">
+              <a16:creationId xmlns:a16="http://schemas.microsoft.com/office/drawing/2014/main" id="{21FD5EC3-734F-E38C-4870-D20D18E0799A}"/>
+            </a:ext>
+          </a:extLst>
+        </p:cNvPr>
+        <p:cNvGrpSpPr/>
+        <p:nvPr/>
+      </p:nvGrpSpPr>
+      <p:grpSpPr>
+        <a:xfrm>
+          <a:off x="0" y="0"/>
+          <a:ext cx="0" cy="0"/>
+          <a:chOff x="0" y="0"/>
+          <a:chExt cx="0" cy="0"/>
+        </a:xfrm>
+      </p:grpSpPr>
+      <p:sp>
+        <p:nvSpPr>
+          <p:cNvPr id="3" name="TextBox 2">
+            <a:extLst>
+              <a:ext uri="{FF2B5EF4-FFF2-40B4-BE49-F238E27FC236}">
+                <a16:creationId xmlns:a16="http://schemas.microsoft.com/office/drawing/2014/main" id="{BF1D0FFB-9116-7C8C-2041-995BFA371BDD}"/>
+              </a:ext>
+            </a:extLst>
+          </p:cNvPr>
+          <p:cNvSpPr txBox="1"/>
+          <p:nvPr/>
+        </p:nvSpPr>
+        <p:spPr>
+          <a:xfrm>
+            <a:off x="0" y="0"/>
+            <a:ext cx="12192000" cy="355354"/>
+          </a:xfrm>
+          <a:prstGeom prst="rect">
+            <a:avLst/>
+          </a:prstGeom>
+          <a:noFill/>
+        </p:spPr>
+        <p:txBody>
+          <a:bodyPr wrap="square">
+            <a:spAutoFit/>
+          </a:bodyPr>
+          <a:lstStyle/>
+          <a:p>
+            <a:pPr>
+              <a:lnSpc>
+                <a:spcPct val="150000"/>
+              </a:lnSpc>
+              <a:buNone/>
+            </a:pPr>
+            <a:r>
+              <a:rPr kumimoji="0" lang="en-US" altLang="en-US" sz="1300" b="0" i="0" u="none" strike="noStrike" cap="none" normalizeH="0" baseline="0">
+                <a:ln>
+                  <a:noFill/>
+                </a:ln>
+                <a:solidFill>
+                  <a:schemeClr val="tx1"/>
+                </a:solidFill>
+                <a:effectLst/>
+                <a:latin typeface="Arial" panose="020B0604020202020204" pitchFamily="34" charset="0"/>
+              </a:rPr>
+              <a:t>.</a:t>
+            </a:r>
+          </a:p>
+        </p:txBody>
+      </p:sp>
+      <p:pic>
+        <p:nvPicPr>
+          <p:cNvPr id="4" name="Picture 3">
+            <a:extLst>
+              <a:ext uri="{FF2B5EF4-FFF2-40B4-BE49-F238E27FC236}">
+                <a16:creationId xmlns:a16="http://schemas.microsoft.com/office/drawing/2014/main" id="{0CBF8856-7D5F-C96A-3830-E5085F110734}"/>
+              </a:ext>
+            </a:extLst>
+          </p:cNvPr>
+          <p:cNvPicPr>
+            <a:picLocks noChangeAspect="1"/>
+          </p:cNvPicPr>
+          <p:nvPr/>
+        </p:nvPicPr>
+        <p:blipFill>
+          <a:blip r:embed="rId2"/>
+          <a:stretch>
+            <a:fillRect/>
+          </a:stretch>
+        </p:blipFill>
+        <p:spPr>
+          <a:xfrm>
+            <a:off x="2589468" y="0"/>
+            <a:ext cx="7013063" cy="6858000"/>
+          </a:xfrm>
+          <a:prstGeom prst="rect">
+            <a:avLst/>
+          </a:prstGeom>
+        </p:spPr>
+      </p:pic>
+    </p:spTree>
+    <p:extLst>
+      <p:ext uri="{BB962C8B-B14F-4D97-AF65-F5344CB8AC3E}">
+        <p14:creationId xmlns:p14="http://schemas.microsoft.com/office/powerpoint/2010/main" val="4233459648"/>
+      </p:ext>
+    </p:extLst>
+  </p:cSld>
+  <p:clrMapOvr>
+    <a:masterClrMapping/>
+  </p:clrMapOvr>
+</p:sld>
+</file>
+
+<file path=ppt/slides/slide19.xml><?xml version="1.0" encoding="utf-8"?>
+<p:sld xmlns:a="http://schemas.openxmlformats.org/drawingml/2006/main" xmlns:r="http://schemas.openxmlformats.org/officeDocument/2006/relationships" xmlns:p="http://schemas.openxmlformats.org/presentationml/2006/main">
+  <p:cSld>
+    <p:spTree>
+      <p:nvGrpSpPr>
+        <p:cNvPr id="1" name="">
+          <a:extLst>
+            <a:ext uri="{FF2B5EF4-FFF2-40B4-BE49-F238E27FC236}">
+              <a16:creationId xmlns:a16="http://schemas.microsoft.com/office/drawing/2014/main" id="{96FAD48B-23A5-5345-5B11-D3DAF365D709}"/>
+            </a:ext>
+          </a:extLst>
+        </p:cNvPr>
+        <p:cNvGrpSpPr/>
+        <p:nvPr/>
+      </p:nvGrpSpPr>
+      <p:grpSpPr>
+        <a:xfrm>
+          <a:off x="0" y="0"/>
+          <a:ext cx="0" cy="0"/>
+          <a:chOff x="0" y="0"/>
+          <a:chExt cx="0" cy="0"/>
+        </a:xfrm>
+      </p:grpSpPr>
+      <p:sp>
+        <p:nvSpPr>
+          <p:cNvPr id="3" name="TextBox 2">
+            <a:extLst>
+              <a:ext uri="{FF2B5EF4-FFF2-40B4-BE49-F238E27FC236}">
+                <a16:creationId xmlns:a16="http://schemas.microsoft.com/office/drawing/2014/main" id="{A2F52BD0-5B9D-90BD-5E80-C534E9757FE1}"/>
+              </a:ext>
+            </a:extLst>
+          </p:cNvPr>
+          <p:cNvSpPr txBox="1"/>
+          <p:nvPr/>
+        </p:nvSpPr>
+        <p:spPr>
+          <a:xfrm>
+            <a:off x="0" y="0"/>
+            <a:ext cx="12192000" cy="355354"/>
+          </a:xfrm>
+          <a:prstGeom prst="rect">
+            <a:avLst/>
+          </a:prstGeom>
+          <a:noFill/>
+        </p:spPr>
+        <p:txBody>
+          <a:bodyPr wrap="square">
+            <a:spAutoFit/>
+          </a:bodyPr>
+          <a:lstStyle/>
+          <a:p>
+            <a:pPr>
+              <a:lnSpc>
+                <a:spcPct val="150000"/>
+              </a:lnSpc>
+              <a:buNone/>
+            </a:pPr>
+            <a:r>
+              <a:rPr kumimoji="0" lang="en-US" altLang="en-US" sz="1300" b="0" i="0" u="none" strike="noStrike" cap="none" normalizeH="0" baseline="0">
+                <a:ln>
+                  <a:noFill/>
+                </a:ln>
+                <a:solidFill>
+                  <a:schemeClr val="tx1"/>
+                </a:solidFill>
+                <a:effectLst/>
+                <a:latin typeface="Arial" panose="020B0604020202020204" pitchFamily="34" charset="0"/>
+              </a:rPr>
+              <a:t>.</a:t>
+            </a:r>
+          </a:p>
+        </p:txBody>
+      </p:sp>
+      <p:pic>
+        <p:nvPicPr>
+          <p:cNvPr id="4" name="Picture 3">
+            <a:extLst>
+              <a:ext uri="{FF2B5EF4-FFF2-40B4-BE49-F238E27FC236}">
+                <a16:creationId xmlns:a16="http://schemas.microsoft.com/office/drawing/2014/main" id="{1690C02A-6680-38FF-64B7-5AC7AD0973A0}"/>
+              </a:ext>
+            </a:extLst>
+          </p:cNvPr>
+          <p:cNvPicPr>
+            <a:picLocks noChangeAspect="1"/>
+          </p:cNvPicPr>
+          <p:nvPr/>
+        </p:nvPicPr>
+        <p:blipFill>
+          <a:blip r:embed="rId2"/>
+          <a:stretch>
+            <a:fillRect/>
+          </a:stretch>
+        </p:blipFill>
+        <p:spPr>
+          <a:xfrm>
+            <a:off x="2561492" y="0"/>
+            <a:ext cx="7069015" cy="6858000"/>
+          </a:xfrm>
+          <a:prstGeom prst="rect">
+            <a:avLst/>
+          </a:prstGeom>
+        </p:spPr>
+      </p:pic>
+    </p:spTree>
+    <p:extLst>
+      <p:ext uri="{BB962C8B-B14F-4D97-AF65-F5344CB8AC3E}">
+        <p14:creationId xmlns:p14="http://schemas.microsoft.com/office/powerpoint/2010/main" val="1347456250"/>
       </p:ext>
     </p:extLst>
   </p:cSld>
@@ -3472,10 +4682,736 @@
           </a:p>
         </p:txBody>
       </p:sp>
+      <p:pic>
+        <p:nvPicPr>
+          <p:cNvPr id="4" name="Picture 3">
+            <a:extLst>
+              <a:ext uri="{FF2B5EF4-FFF2-40B4-BE49-F238E27FC236}">
+                <a16:creationId xmlns:a16="http://schemas.microsoft.com/office/drawing/2014/main" id="{E3E81AB1-4F0E-932C-24D5-4B5660DDBF0F}"/>
+              </a:ext>
+            </a:extLst>
+          </p:cNvPr>
+          <p:cNvPicPr>
+            <a:picLocks noChangeAspect="1"/>
+          </p:cNvPicPr>
+          <p:nvPr/>
+        </p:nvPicPr>
+        <p:blipFill>
+          <a:blip r:embed="rId2"/>
+          <a:stretch>
+            <a:fillRect/>
+          </a:stretch>
+        </p:blipFill>
+        <p:spPr>
+          <a:xfrm>
+            <a:off x="2267950" y="0"/>
+            <a:ext cx="7656099" cy="6858000"/>
+          </a:xfrm>
+          <a:prstGeom prst="rect">
+            <a:avLst/>
+          </a:prstGeom>
+        </p:spPr>
+      </p:pic>
     </p:spTree>
     <p:extLst>
       <p:ext uri="{BB962C8B-B14F-4D97-AF65-F5344CB8AC3E}">
         <p14:creationId xmlns:p14="http://schemas.microsoft.com/office/powerpoint/2010/main" val="4089772302"/>
+      </p:ext>
+    </p:extLst>
+  </p:cSld>
+  <p:clrMapOvr>
+    <a:masterClrMapping/>
+  </p:clrMapOvr>
+</p:sld>
+</file>
+
+<file path=ppt/slides/slide20.xml><?xml version="1.0" encoding="utf-8"?>
+<p:sld xmlns:a="http://schemas.openxmlformats.org/drawingml/2006/main" xmlns:r="http://schemas.openxmlformats.org/officeDocument/2006/relationships" xmlns:p="http://schemas.openxmlformats.org/presentationml/2006/main">
+  <p:cSld>
+    <p:spTree>
+      <p:nvGrpSpPr>
+        <p:cNvPr id="1" name="">
+          <a:extLst>
+            <a:ext uri="{FF2B5EF4-FFF2-40B4-BE49-F238E27FC236}">
+              <a16:creationId xmlns:a16="http://schemas.microsoft.com/office/drawing/2014/main" id="{7D09C8E6-F906-12E4-5625-051D9BBD731B}"/>
+            </a:ext>
+          </a:extLst>
+        </p:cNvPr>
+        <p:cNvGrpSpPr/>
+        <p:nvPr/>
+      </p:nvGrpSpPr>
+      <p:grpSpPr>
+        <a:xfrm>
+          <a:off x="0" y="0"/>
+          <a:ext cx="0" cy="0"/>
+          <a:chOff x="0" y="0"/>
+          <a:chExt cx="0" cy="0"/>
+        </a:xfrm>
+      </p:grpSpPr>
+      <p:sp>
+        <p:nvSpPr>
+          <p:cNvPr id="3" name="TextBox 2">
+            <a:extLst>
+              <a:ext uri="{FF2B5EF4-FFF2-40B4-BE49-F238E27FC236}">
+                <a16:creationId xmlns:a16="http://schemas.microsoft.com/office/drawing/2014/main" id="{6237056B-2408-8F15-4B85-F77B84A10638}"/>
+              </a:ext>
+            </a:extLst>
+          </p:cNvPr>
+          <p:cNvSpPr txBox="1"/>
+          <p:nvPr/>
+        </p:nvSpPr>
+        <p:spPr>
+          <a:xfrm>
+            <a:off x="0" y="0"/>
+            <a:ext cx="12192000" cy="355354"/>
+          </a:xfrm>
+          <a:prstGeom prst="rect">
+            <a:avLst/>
+          </a:prstGeom>
+          <a:noFill/>
+        </p:spPr>
+        <p:txBody>
+          <a:bodyPr wrap="square">
+            <a:spAutoFit/>
+          </a:bodyPr>
+          <a:lstStyle/>
+          <a:p>
+            <a:pPr>
+              <a:lnSpc>
+                <a:spcPct val="150000"/>
+              </a:lnSpc>
+              <a:buNone/>
+            </a:pPr>
+            <a:r>
+              <a:rPr kumimoji="0" lang="en-US" altLang="en-US" sz="1300" b="0" i="0" u="none" strike="noStrike" cap="none" normalizeH="0" baseline="0">
+                <a:ln>
+                  <a:noFill/>
+                </a:ln>
+                <a:solidFill>
+                  <a:schemeClr val="tx1"/>
+                </a:solidFill>
+                <a:effectLst/>
+                <a:latin typeface="Arial" panose="020B0604020202020204" pitchFamily="34" charset="0"/>
+              </a:rPr>
+              <a:t>.</a:t>
+            </a:r>
+          </a:p>
+        </p:txBody>
+      </p:sp>
+      <p:pic>
+        <p:nvPicPr>
+          <p:cNvPr id="4" name="Picture 3">
+            <a:extLst>
+              <a:ext uri="{FF2B5EF4-FFF2-40B4-BE49-F238E27FC236}">
+                <a16:creationId xmlns:a16="http://schemas.microsoft.com/office/drawing/2014/main" id="{E472EADA-031A-5A21-E3A6-4431B693561F}"/>
+              </a:ext>
+            </a:extLst>
+          </p:cNvPr>
+          <p:cNvPicPr>
+            <a:picLocks noChangeAspect="1"/>
+          </p:cNvPicPr>
+          <p:nvPr/>
+        </p:nvPicPr>
+        <p:blipFill>
+          <a:blip r:embed="rId2"/>
+          <a:stretch>
+            <a:fillRect/>
+          </a:stretch>
+        </p:blipFill>
+        <p:spPr>
+          <a:xfrm>
+            <a:off x="0" y="1330011"/>
+            <a:ext cx="12192000" cy="4197978"/>
+          </a:xfrm>
+          <a:prstGeom prst="rect">
+            <a:avLst/>
+          </a:prstGeom>
+          <a:solidFill>
+            <a:srgbClr val="FFFFFF">
+              <a:shade val="85000"/>
+            </a:srgbClr>
+          </a:solidFill>
+          <a:ln w="88900" cap="sq">
+            <a:solidFill>
+              <a:srgbClr val="FFFFFF"/>
+            </a:solidFill>
+            <a:miter lim="800000"/>
+          </a:ln>
+          <a:effectLst>
+            <a:outerShdw blurRad="55000" dist="18000" dir="5400000" algn="tl" rotWithShape="0">
+              <a:srgbClr val="000000">
+                <a:alpha val="40000"/>
+              </a:srgbClr>
+            </a:outerShdw>
+          </a:effectLst>
+          <a:scene3d>
+            <a:camera prst="orthographicFront"/>
+            <a:lightRig rig="twoPt" dir="t">
+              <a:rot lat="0" lon="0" rev="7200000"/>
+            </a:lightRig>
+          </a:scene3d>
+          <a:sp3d>
+            <a:bevelT w="25400" h="19050"/>
+            <a:contourClr>
+              <a:srgbClr val="FFFFFF"/>
+            </a:contourClr>
+          </a:sp3d>
+        </p:spPr>
+      </p:pic>
+    </p:spTree>
+    <p:extLst>
+      <p:ext uri="{BB962C8B-B14F-4D97-AF65-F5344CB8AC3E}">
+        <p14:creationId xmlns:p14="http://schemas.microsoft.com/office/powerpoint/2010/main" val="2713783543"/>
+      </p:ext>
+    </p:extLst>
+  </p:cSld>
+  <p:clrMapOvr>
+    <a:masterClrMapping/>
+  </p:clrMapOvr>
+</p:sld>
+</file>
+
+<file path=ppt/slides/slide21.xml><?xml version="1.0" encoding="utf-8"?>
+<p:sld xmlns:a="http://schemas.openxmlformats.org/drawingml/2006/main" xmlns:r="http://schemas.openxmlformats.org/officeDocument/2006/relationships" xmlns:p="http://schemas.openxmlformats.org/presentationml/2006/main">
+  <p:cSld>
+    <p:spTree>
+      <p:nvGrpSpPr>
+        <p:cNvPr id="1" name="">
+          <a:extLst>
+            <a:ext uri="{FF2B5EF4-FFF2-40B4-BE49-F238E27FC236}">
+              <a16:creationId xmlns:a16="http://schemas.microsoft.com/office/drawing/2014/main" id="{F9BD257F-CFDA-5943-372F-B1DBA2715C21}"/>
+            </a:ext>
+          </a:extLst>
+        </p:cNvPr>
+        <p:cNvGrpSpPr/>
+        <p:nvPr/>
+      </p:nvGrpSpPr>
+      <p:grpSpPr>
+        <a:xfrm>
+          <a:off x="0" y="0"/>
+          <a:ext cx="0" cy="0"/>
+          <a:chOff x="0" y="0"/>
+          <a:chExt cx="0" cy="0"/>
+        </a:xfrm>
+      </p:grpSpPr>
+      <p:sp>
+        <p:nvSpPr>
+          <p:cNvPr id="3" name="TextBox 2">
+            <a:extLst>
+              <a:ext uri="{FF2B5EF4-FFF2-40B4-BE49-F238E27FC236}">
+                <a16:creationId xmlns:a16="http://schemas.microsoft.com/office/drawing/2014/main" id="{5704A4AA-BD05-DBEC-0798-5B06B5BC5081}"/>
+              </a:ext>
+            </a:extLst>
+          </p:cNvPr>
+          <p:cNvSpPr txBox="1"/>
+          <p:nvPr/>
+        </p:nvSpPr>
+        <p:spPr>
+          <a:xfrm>
+            <a:off x="0" y="0"/>
+            <a:ext cx="12192000" cy="355354"/>
+          </a:xfrm>
+          <a:prstGeom prst="rect">
+            <a:avLst/>
+          </a:prstGeom>
+          <a:noFill/>
+        </p:spPr>
+        <p:txBody>
+          <a:bodyPr wrap="square">
+            <a:spAutoFit/>
+          </a:bodyPr>
+          <a:lstStyle/>
+          <a:p>
+            <a:pPr>
+              <a:lnSpc>
+                <a:spcPct val="150000"/>
+              </a:lnSpc>
+              <a:buNone/>
+            </a:pPr>
+            <a:r>
+              <a:rPr kumimoji="0" lang="en-US" altLang="en-US" sz="1300" b="0" i="0" u="none" strike="noStrike" cap="none" normalizeH="0" baseline="0">
+                <a:ln>
+                  <a:noFill/>
+                </a:ln>
+                <a:solidFill>
+                  <a:schemeClr val="tx1"/>
+                </a:solidFill>
+                <a:effectLst/>
+                <a:latin typeface="Arial" panose="020B0604020202020204" pitchFamily="34" charset="0"/>
+              </a:rPr>
+              <a:t>.</a:t>
+            </a:r>
+          </a:p>
+        </p:txBody>
+      </p:sp>
+      <p:pic>
+        <p:nvPicPr>
+          <p:cNvPr id="4" name="Picture 3">
+            <a:extLst>
+              <a:ext uri="{FF2B5EF4-FFF2-40B4-BE49-F238E27FC236}">
+                <a16:creationId xmlns:a16="http://schemas.microsoft.com/office/drawing/2014/main" id="{2A2B1F19-AECB-FFF5-0A6C-AA165EE43EBF}"/>
+              </a:ext>
+            </a:extLst>
+          </p:cNvPr>
+          <p:cNvPicPr>
+            <a:picLocks noChangeAspect="1"/>
+          </p:cNvPicPr>
+          <p:nvPr/>
+        </p:nvPicPr>
+        <p:blipFill>
+          <a:blip r:embed="rId2"/>
+          <a:stretch>
+            <a:fillRect/>
+          </a:stretch>
+        </p:blipFill>
+        <p:spPr>
+          <a:xfrm>
+            <a:off x="0" y="1330011"/>
+            <a:ext cx="12192000" cy="4197978"/>
+          </a:xfrm>
+          <a:prstGeom prst="rect">
+            <a:avLst/>
+          </a:prstGeom>
+        </p:spPr>
+      </p:pic>
+    </p:spTree>
+    <p:extLst>
+      <p:ext uri="{BB962C8B-B14F-4D97-AF65-F5344CB8AC3E}">
+        <p14:creationId xmlns:p14="http://schemas.microsoft.com/office/powerpoint/2010/main" val="3661226239"/>
+      </p:ext>
+    </p:extLst>
+  </p:cSld>
+  <p:clrMapOvr>
+    <a:masterClrMapping/>
+  </p:clrMapOvr>
+</p:sld>
+</file>
+
+<file path=ppt/slides/slide22.xml><?xml version="1.0" encoding="utf-8"?>
+<p:sld xmlns:a="http://schemas.openxmlformats.org/drawingml/2006/main" xmlns:r="http://schemas.openxmlformats.org/officeDocument/2006/relationships" xmlns:p="http://schemas.openxmlformats.org/presentationml/2006/main">
+  <p:cSld>
+    <p:spTree>
+      <p:nvGrpSpPr>
+        <p:cNvPr id="1" name="">
+          <a:extLst>
+            <a:ext uri="{FF2B5EF4-FFF2-40B4-BE49-F238E27FC236}">
+              <a16:creationId xmlns:a16="http://schemas.microsoft.com/office/drawing/2014/main" id="{234FC578-E916-157D-9E34-98C92603E544}"/>
+            </a:ext>
+          </a:extLst>
+        </p:cNvPr>
+        <p:cNvGrpSpPr/>
+        <p:nvPr/>
+      </p:nvGrpSpPr>
+      <p:grpSpPr>
+        <a:xfrm>
+          <a:off x="0" y="0"/>
+          <a:ext cx="0" cy="0"/>
+          <a:chOff x="0" y="0"/>
+          <a:chExt cx="0" cy="0"/>
+        </a:xfrm>
+      </p:grpSpPr>
+      <p:sp>
+        <p:nvSpPr>
+          <p:cNvPr id="3" name="TextBox 2">
+            <a:extLst>
+              <a:ext uri="{FF2B5EF4-FFF2-40B4-BE49-F238E27FC236}">
+                <a16:creationId xmlns:a16="http://schemas.microsoft.com/office/drawing/2014/main" id="{44E910EB-F8CF-72DB-1654-E9E111A3D87E}"/>
+              </a:ext>
+            </a:extLst>
+          </p:cNvPr>
+          <p:cNvSpPr txBox="1"/>
+          <p:nvPr/>
+        </p:nvSpPr>
+        <p:spPr>
+          <a:xfrm>
+            <a:off x="0" y="0"/>
+            <a:ext cx="12192000" cy="355354"/>
+          </a:xfrm>
+          <a:prstGeom prst="rect">
+            <a:avLst/>
+          </a:prstGeom>
+          <a:noFill/>
+        </p:spPr>
+        <p:txBody>
+          <a:bodyPr wrap="square">
+            <a:spAutoFit/>
+          </a:bodyPr>
+          <a:lstStyle/>
+          <a:p>
+            <a:pPr>
+              <a:lnSpc>
+                <a:spcPct val="150000"/>
+              </a:lnSpc>
+              <a:buNone/>
+            </a:pPr>
+            <a:r>
+              <a:rPr kumimoji="0" lang="en-US" altLang="en-US" sz="1300" b="0" i="0" u="none" strike="noStrike" cap="none" normalizeH="0" baseline="0">
+                <a:ln>
+                  <a:noFill/>
+                </a:ln>
+                <a:solidFill>
+                  <a:schemeClr val="tx1"/>
+                </a:solidFill>
+                <a:effectLst/>
+                <a:latin typeface="Arial" panose="020B0604020202020204" pitchFamily="34" charset="0"/>
+              </a:rPr>
+              <a:t>.</a:t>
+            </a:r>
+          </a:p>
+        </p:txBody>
+      </p:sp>
+      <p:pic>
+        <p:nvPicPr>
+          <p:cNvPr id="4" name="Picture 3">
+            <a:extLst>
+              <a:ext uri="{FF2B5EF4-FFF2-40B4-BE49-F238E27FC236}">
+                <a16:creationId xmlns:a16="http://schemas.microsoft.com/office/drawing/2014/main" id="{10C520E7-DE0A-A007-0D30-D11E5056ECC9}"/>
+              </a:ext>
+            </a:extLst>
+          </p:cNvPr>
+          <p:cNvPicPr>
+            <a:picLocks noChangeAspect="1"/>
+          </p:cNvPicPr>
+          <p:nvPr/>
+        </p:nvPicPr>
+        <p:blipFill>
+          <a:blip r:embed="rId2"/>
+          <a:stretch>
+            <a:fillRect/>
+          </a:stretch>
+        </p:blipFill>
+        <p:spPr>
+          <a:xfrm>
+            <a:off x="0" y="1070902"/>
+            <a:ext cx="12192000" cy="4716195"/>
+          </a:xfrm>
+          <a:prstGeom prst="rect">
+            <a:avLst/>
+          </a:prstGeom>
+        </p:spPr>
+      </p:pic>
+    </p:spTree>
+    <p:extLst>
+      <p:ext uri="{BB962C8B-B14F-4D97-AF65-F5344CB8AC3E}">
+        <p14:creationId xmlns:p14="http://schemas.microsoft.com/office/powerpoint/2010/main" val="616314994"/>
+      </p:ext>
+    </p:extLst>
+  </p:cSld>
+  <p:clrMapOvr>
+    <a:masterClrMapping/>
+  </p:clrMapOvr>
+</p:sld>
+</file>
+
+<file path=ppt/slides/slide23.xml><?xml version="1.0" encoding="utf-8"?>
+<p:sld xmlns:a="http://schemas.openxmlformats.org/drawingml/2006/main" xmlns:r="http://schemas.openxmlformats.org/officeDocument/2006/relationships" xmlns:p="http://schemas.openxmlformats.org/presentationml/2006/main">
+  <p:cSld>
+    <p:spTree>
+      <p:nvGrpSpPr>
+        <p:cNvPr id="1" name="">
+          <a:extLst>
+            <a:ext uri="{FF2B5EF4-FFF2-40B4-BE49-F238E27FC236}">
+              <a16:creationId xmlns:a16="http://schemas.microsoft.com/office/drawing/2014/main" id="{C374DF2C-8DA1-454A-9B96-1C56A3B2604C}"/>
+            </a:ext>
+          </a:extLst>
+        </p:cNvPr>
+        <p:cNvGrpSpPr/>
+        <p:nvPr/>
+      </p:nvGrpSpPr>
+      <p:grpSpPr>
+        <a:xfrm>
+          <a:off x="0" y="0"/>
+          <a:ext cx="0" cy="0"/>
+          <a:chOff x="0" y="0"/>
+          <a:chExt cx="0" cy="0"/>
+        </a:xfrm>
+      </p:grpSpPr>
+      <p:sp>
+        <p:nvSpPr>
+          <p:cNvPr id="3" name="TextBox 2">
+            <a:extLst>
+              <a:ext uri="{FF2B5EF4-FFF2-40B4-BE49-F238E27FC236}">
+                <a16:creationId xmlns:a16="http://schemas.microsoft.com/office/drawing/2014/main" id="{9BFC1455-6151-DE1D-5578-7B083A043F21}"/>
+              </a:ext>
+            </a:extLst>
+          </p:cNvPr>
+          <p:cNvSpPr txBox="1"/>
+          <p:nvPr/>
+        </p:nvSpPr>
+        <p:spPr>
+          <a:xfrm>
+            <a:off x="0" y="0"/>
+            <a:ext cx="12192000" cy="355354"/>
+          </a:xfrm>
+          <a:prstGeom prst="rect">
+            <a:avLst/>
+          </a:prstGeom>
+          <a:noFill/>
+        </p:spPr>
+        <p:txBody>
+          <a:bodyPr wrap="square">
+            <a:spAutoFit/>
+          </a:bodyPr>
+          <a:lstStyle/>
+          <a:p>
+            <a:pPr>
+              <a:lnSpc>
+                <a:spcPct val="150000"/>
+              </a:lnSpc>
+              <a:buNone/>
+            </a:pPr>
+            <a:r>
+              <a:rPr kumimoji="0" lang="en-US" altLang="en-US" sz="1300" b="0" i="0" u="none" strike="noStrike" cap="none" normalizeH="0" baseline="0">
+                <a:ln>
+                  <a:noFill/>
+                </a:ln>
+                <a:solidFill>
+                  <a:schemeClr val="tx1"/>
+                </a:solidFill>
+                <a:effectLst/>
+                <a:latin typeface="Arial" panose="020B0604020202020204" pitchFamily="34" charset="0"/>
+              </a:rPr>
+              <a:t>.</a:t>
+            </a:r>
+          </a:p>
+        </p:txBody>
+      </p:sp>
+      <p:pic>
+        <p:nvPicPr>
+          <p:cNvPr id="4" name="Picture 3">
+            <a:extLst>
+              <a:ext uri="{FF2B5EF4-FFF2-40B4-BE49-F238E27FC236}">
+                <a16:creationId xmlns:a16="http://schemas.microsoft.com/office/drawing/2014/main" id="{60D52E6B-5175-E34A-5DD0-860C8F367641}"/>
+              </a:ext>
+            </a:extLst>
+          </p:cNvPr>
+          <p:cNvPicPr>
+            <a:picLocks noChangeAspect="1"/>
+          </p:cNvPicPr>
+          <p:nvPr/>
+        </p:nvPicPr>
+        <p:blipFill>
+          <a:blip r:embed="rId2"/>
+          <a:stretch>
+            <a:fillRect/>
+          </a:stretch>
+        </p:blipFill>
+        <p:spPr>
+          <a:xfrm>
+            <a:off x="0" y="1366276"/>
+            <a:ext cx="12192000" cy="4125447"/>
+          </a:xfrm>
+          <a:prstGeom prst="rect">
+            <a:avLst/>
+          </a:prstGeom>
+          <a:solidFill>
+            <a:srgbClr val="FFFFFF">
+              <a:shade val="85000"/>
+            </a:srgbClr>
+          </a:solidFill>
+          <a:ln w="88900" cap="sq">
+            <a:solidFill>
+              <a:srgbClr val="FFFFFF"/>
+            </a:solidFill>
+            <a:miter lim="800000"/>
+          </a:ln>
+          <a:effectLst>
+            <a:outerShdw blurRad="55000" dist="18000" dir="5400000" algn="tl" rotWithShape="0">
+              <a:srgbClr val="000000">
+                <a:alpha val="40000"/>
+              </a:srgbClr>
+            </a:outerShdw>
+          </a:effectLst>
+          <a:scene3d>
+            <a:camera prst="orthographicFront"/>
+            <a:lightRig rig="twoPt" dir="t">
+              <a:rot lat="0" lon="0" rev="7200000"/>
+            </a:lightRig>
+          </a:scene3d>
+          <a:sp3d>
+            <a:bevelT w="25400" h="19050"/>
+            <a:contourClr>
+              <a:srgbClr val="FFFFFF"/>
+            </a:contourClr>
+          </a:sp3d>
+        </p:spPr>
+      </p:pic>
+    </p:spTree>
+    <p:extLst>
+      <p:ext uri="{BB962C8B-B14F-4D97-AF65-F5344CB8AC3E}">
+        <p14:creationId xmlns:p14="http://schemas.microsoft.com/office/powerpoint/2010/main" val="2487811232"/>
+      </p:ext>
+    </p:extLst>
+  </p:cSld>
+  <p:clrMapOvr>
+    <a:masterClrMapping/>
+  </p:clrMapOvr>
+</p:sld>
+</file>
+
+<file path=ppt/slides/slide24.xml><?xml version="1.0" encoding="utf-8"?>
+<p:sld xmlns:a="http://schemas.openxmlformats.org/drawingml/2006/main" xmlns:r="http://schemas.openxmlformats.org/officeDocument/2006/relationships" xmlns:p="http://schemas.openxmlformats.org/presentationml/2006/main">
+  <p:cSld>
+    <p:spTree>
+      <p:nvGrpSpPr>
+        <p:cNvPr id="1" name="">
+          <a:extLst>
+            <a:ext uri="{FF2B5EF4-FFF2-40B4-BE49-F238E27FC236}">
+              <a16:creationId xmlns:a16="http://schemas.microsoft.com/office/drawing/2014/main" id="{5C76CF37-CAE7-A175-127E-194002D790D3}"/>
+            </a:ext>
+          </a:extLst>
+        </p:cNvPr>
+        <p:cNvGrpSpPr/>
+        <p:nvPr/>
+      </p:nvGrpSpPr>
+      <p:grpSpPr>
+        <a:xfrm>
+          <a:off x="0" y="0"/>
+          <a:ext cx="0" cy="0"/>
+          <a:chOff x="0" y="0"/>
+          <a:chExt cx="0" cy="0"/>
+        </a:xfrm>
+      </p:grpSpPr>
+      <p:sp>
+        <p:nvSpPr>
+          <p:cNvPr id="3" name="TextBox 2">
+            <a:extLst>
+              <a:ext uri="{FF2B5EF4-FFF2-40B4-BE49-F238E27FC236}">
+                <a16:creationId xmlns:a16="http://schemas.microsoft.com/office/drawing/2014/main" id="{D5A849A9-F3F5-1D2F-2E59-ECEB2CE78E27}"/>
+              </a:ext>
+            </a:extLst>
+          </p:cNvPr>
+          <p:cNvSpPr txBox="1"/>
+          <p:nvPr/>
+        </p:nvSpPr>
+        <p:spPr>
+          <a:xfrm>
+            <a:off x="0" y="0"/>
+            <a:ext cx="12192000" cy="355354"/>
+          </a:xfrm>
+          <a:prstGeom prst="rect">
+            <a:avLst/>
+          </a:prstGeom>
+          <a:noFill/>
+        </p:spPr>
+        <p:txBody>
+          <a:bodyPr wrap="square">
+            <a:spAutoFit/>
+          </a:bodyPr>
+          <a:lstStyle/>
+          <a:p>
+            <a:pPr>
+              <a:lnSpc>
+                <a:spcPct val="150000"/>
+              </a:lnSpc>
+              <a:buNone/>
+            </a:pPr>
+            <a:r>
+              <a:rPr kumimoji="0" lang="en-US" altLang="en-US" sz="1300" b="0" i="0" u="none" strike="noStrike" cap="none" normalizeH="0" baseline="0">
+                <a:ln>
+                  <a:noFill/>
+                </a:ln>
+                <a:solidFill>
+                  <a:schemeClr val="tx1"/>
+                </a:solidFill>
+                <a:effectLst/>
+                <a:latin typeface="Arial" panose="020B0604020202020204" pitchFamily="34" charset="0"/>
+              </a:rPr>
+              <a:t>.</a:t>
+            </a:r>
+          </a:p>
+        </p:txBody>
+      </p:sp>
+    </p:spTree>
+    <p:extLst>
+      <p:ext uri="{BB962C8B-B14F-4D97-AF65-F5344CB8AC3E}">
+        <p14:creationId xmlns:p14="http://schemas.microsoft.com/office/powerpoint/2010/main" val="813826765"/>
+      </p:ext>
+    </p:extLst>
+  </p:cSld>
+  <p:clrMapOvr>
+    <a:masterClrMapping/>
+  </p:clrMapOvr>
+</p:sld>
+</file>
+
+<file path=ppt/slides/slide25.xml><?xml version="1.0" encoding="utf-8"?>
+<p:sld xmlns:a="http://schemas.openxmlformats.org/drawingml/2006/main" xmlns:r="http://schemas.openxmlformats.org/officeDocument/2006/relationships" xmlns:p="http://schemas.openxmlformats.org/presentationml/2006/main">
+  <p:cSld>
+    <p:spTree>
+      <p:nvGrpSpPr>
+        <p:cNvPr id="1" name="">
+          <a:extLst>
+            <a:ext uri="{FF2B5EF4-FFF2-40B4-BE49-F238E27FC236}">
+              <a16:creationId xmlns:a16="http://schemas.microsoft.com/office/drawing/2014/main" id="{4EC4B22C-2CC9-DD2C-BADE-71C1FFB840CF}"/>
+            </a:ext>
+          </a:extLst>
+        </p:cNvPr>
+        <p:cNvGrpSpPr/>
+        <p:nvPr/>
+      </p:nvGrpSpPr>
+      <p:grpSpPr>
+        <a:xfrm>
+          <a:off x="0" y="0"/>
+          <a:ext cx="0" cy="0"/>
+          <a:chOff x="0" y="0"/>
+          <a:chExt cx="0" cy="0"/>
+        </a:xfrm>
+      </p:grpSpPr>
+      <p:sp>
+        <p:nvSpPr>
+          <p:cNvPr id="3" name="TextBox 2">
+            <a:extLst>
+              <a:ext uri="{FF2B5EF4-FFF2-40B4-BE49-F238E27FC236}">
+                <a16:creationId xmlns:a16="http://schemas.microsoft.com/office/drawing/2014/main" id="{9BA036BA-462D-BF7C-8E06-EABC55375E2A}"/>
+              </a:ext>
+            </a:extLst>
+          </p:cNvPr>
+          <p:cNvSpPr txBox="1"/>
+          <p:nvPr/>
+        </p:nvSpPr>
+        <p:spPr>
+          <a:xfrm>
+            <a:off x="0" y="0"/>
+            <a:ext cx="12192000" cy="355354"/>
+          </a:xfrm>
+          <a:prstGeom prst="rect">
+            <a:avLst/>
+          </a:prstGeom>
+          <a:noFill/>
+        </p:spPr>
+        <p:txBody>
+          <a:bodyPr wrap="square">
+            <a:spAutoFit/>
+          </a:bodyPr>
+          <a:lstStyle/>
+          <a:p>
+            <a:pPr>
+              <a:lnSpc>
+                <a:spcPct val="150000"/>
+              </a:lnSpc>
+              <a:buNone/>
+            </a:pPr>
+            <a:r>
+              <a:rPr kumimoji="0" lang="en-US" altLang="en-US" sz="1300" b="0" i="0" u="none" strike="noStrike" cap="none" normalizeH="0" baseline="0">
+                <a:ln>
+                  <a:noFill/>
+                </a:ln>
+                <a:solidFill>
+                  <a:schemeClr val="tx1"/>
+                </a:solidFill>
+                <a:effectLst/>
+                <a:latin typeface="Arial" panose="020B0604020202020204" pitchFamily="34" charset="0"/>
+              </a:rPr>
+              <a:t>.</a:t>
+            </a:r>
+          </a:p>
+        </p:txBody>
+      </p:sp>
+    </p:spTree>
+    <p:extLst>
+      <p:ext uri="{BB962C8B-B14F-4D97-AF65-F5344CB8AC3E}">
+        <p14:creationId xmlns:p14="http://schemas.microsoft.com/office/powerpoint/2010/main" val="3655195724"/>
       </p:ext>
     </p:extLst>
   </p:cSld>
@@ -3558,6 +5494,36 @@
           </a:p>
         </p:txBody>
       </p:sp>
+      <p:pic>
+        <p:nvPicPr>
+          <p:cNvPr id="4" name="Picture 3">
+            <a:extLst>
+              <a:ext uri="{FF2B5EF4-FFF2-40B4-BE49-F238E27FC236}">
+                <a16:creationId xmlns:a16="http://schemas.microsoft.com/office/drawing/2014/main" id="{F4927E14-41C7-B9B7-FECD-EF75D1944A7D}"/>
+              </a:ext>
+            </a:extLst>
+          </p:cNvPr>
+          <p:cNvPicPr>
+            <a:picLocks noChangeAspect="1"/>
+          </p:cNvPicPr>
+          <p:nvPr/>
+        </p:nvPicPr>
+        <p:blipFill>
+          <a:blip r:embed="rId2"/>
+          <a:stretch>
+            <a:fillRect/>
+          </a:stretch>
+        </p:blipFill>
+        <p:spPr>
+          <a:xfrm>
+            <a:off x="2407811" y="0"/>
+            <a:ext cx="7376378" cy="6858000"/>
+          </a:xfrm>
+          <a:prstGeom prst="rect">
+            <a:avLst/>
+          </a:prstGeom>
+        </p:spPr>
+      </p:pic>
     </p:spTree>
     <p:extLst>
       <p:ext uri="{BB962C8B-B14F-4D97-AF65-F5344CB8AC3E}">
@@ -3609,7 +5575,7 @@
         <p:spPr>
           <a:xfrm>
             <a:off x="0" y="0"/>
-            <a:ext cx="12192000" cy="355354"/>
+            <a:ext cx="12192000" cy="655436"/>
           </a:xfrm>
           <a:prstGeom prst="rect">
             <a:avLst/>
@@ -3629,7 +5595,45 @@
               <a:buNone/>
             </a:pPr>
             <a:r>
-              <a:rPr kumimoji="0" lang="en-US" altLang="en-US" sz="1300" b="0" i="0" u="none" strike="noStrike" cap="none" normalizeH="0" baseline="0">
+              <a:rPr lang="az-Latn-AZ" altLang="en-US" sz="1300">
+                <a:latin typeface="Arial" panose="020B0604020202020204" pitchFamily="34" charset="0"/>
+              </a:rPr>
+              <a:t>Seçilən dəyərə görə </a:t>
+            </a:r>
+            <a:r>
+              <a:rPr lang="az-Latn-AZ" altLang="en-US" sz="1300" b="1">
+                <a:latin typeface="Arial" panose="020B0604020202020204" pitchFamily="34" charset="0"/>
+              </a:rPr>
+              <a:t>Minimum Order Amount </a:t>
+            </a:r>
+            <a:r>
+              <a:rPr lang="az-Latn-AZ" altLang="en-US" sz="1300">
+                <a:latin typeface="Arial" panose="020B0604020202020204" pitchFamily="34" charset="0"/>
+              </a:rPr>
+              <a:t>elementi</a:t>
+            </a:r>
+            <a:r>
+              <a:rPr lang="az-Latn-AZ" altLang="en-US" sz="1300" b="1">
+                <a:latin typeface="Arial" panose="020B0604020202020204" pitchFamily="34" charset="0"/>
+              </a:rPr>
+              <a:t> </a:t>
+            </a:r>
+            <a:r>
+              <a:rPr lang="az-Latn-AZ" altLang="en-US" sz="1300">
+                <a:latin typeface="Arial" panose="020B0604020202020204" pitchFamily="34" charset="0"/>
+              </a:rPr>
+              <a:t>göstərilsin mi,</a:t>
+            </a:r>
+          </a:p>
+          <a:p>
+            <a:pPr>
+              <a:lnSpc>
+                <a:spcPct val="150000"/>
+              </a:lnSpc>
+              <a:buNone/>
+            </a:pPr>
+            <a:r>
+              <a:rPr kumimoji="0" lang="az-Latn-AZ" altLang="en-US" sz="1300" b="0" i="0" u="none" strike="noStrike" cap="none" normalizeH="0" baseline="0">
                 <a:ln>
                   <a:noFill/>
                 </a:ln>
@@ -3639,11 +5643,51 @@
                 <a:effectLst/>
                 <a:latin typeface="Arial" panose="020B0604020202020204" pitchFamily="34" charset="0"/>
               </a:rPr>
-              <a:t>.</a:t>
-            </a:r>
-          </a:p>
-        </p:txBody>
-      </p:sp>
+              <a:t>yoxsa göstərilməsin mi onu təyin edirik.</a:t>
+            </a:r>
+            <a:endParaRPr kumimoji="0" lang="en-US" altLang="en-US" sz="1300" b="0" i="0" u="none" strike="noStrike" cap="none" normalizeH="0" baseline="0">
+              <a:ln>
+                <a:noFill/>
+              </a:ln>
+              <a:solidFill>
+                <a:schemeClr val="tx1"/>
+              </a:solidFill>
+              <a:effectLst/>
+              <a:latin typeface="Arial" panose="020B0604020202020204" pitchFamily="34" charset="0"/>
+            </a:endParaRPr>
+          </a:p>
+        </p:txBody>
+      </p:sp>
+      <p:pic>
+        <p:nvPicPr>
+          <p:cNvPr id="4" name="Picture 3">
+            <a:extLst>
+              <a:ext uri="{FF2B5EF4-FFF2-40B4-BE49-F238E27FC236}">
+                <a16:creationId xmlns:a16="http://schemas.microsoft.com/office/drawing/2014/main" id="{2A4449D1-D3EA-74D1-38F4-73056CD5BA35}"/>
+              </a:ext>
+            </a:extLst>
+          </p:cNvPr>
+          <p:cNvPicPr>
+            <a:picLocks noChangeAspect="1"/>
+          </p:cNvPicPr>
+          <p:nvPr/>
+        </p:nvPicPr>
+        <p:blipFill>
+          <a:blip r:embed="rId2"/>
+          <a:stretch>
+            <a:fillRect/>
+          </a:stretch>
+        </p:blipFill>
+        <p:spPr>
+          <a:xfrm>
+            <a:off x="6617245" y="0"/>
+            <a:ext cx="5574755" cy="6858000"/>
+          </a:xfrm>
+          <a:prstGeom prst="rect">
+            <a:avLst/>
+          </a:prstGeom>
+        </p:spPr>
+      </p:pic>
     </p:spTree>
     <p:extLst>
       <p:ext uri="{BB962C8B-B14F-4D97-AF65-F5344CB8AC3E}">
@@ -3665,7 +5709,7 @@
         <p:cNvPr id="1" name="">
           <a:extLst>
             <a:ext uri="{FF2B5EF4-FFF2-40B4-BE49-F238E27FC236}">
-              <a16:creationId xmlns:a16="http://schemas.microsoft.com/office/drawing/2014/main" id="{234FC578-E916-157D-9E34-98C92603E544}"/>
+              <a16:creationId xmlns:a16="http://schemas.microsoft.com/office/drawing/2014/main" id="{44CA500A-4675-EC65-3D95-CFBC8E3C6E4B}"/>
             </a:ext>
           </a:extLst>
         </p:cNvPr>
@@ -3685,7 +5729,7 @@
           <p:cNvPr id="3" name="TextBox 2">
             <a:extLst>
               <a:ext uri="{FF2B5EF4-FFF2-40B4-BE49-F238E27FC236}">
-                <a16:creationId xmlns:a16="http://schemas.microsoft.com/office/drawing/2014/main" id="{44E910EB-F8CF-72DB-1654-E9E111A3D87E}"/>
+                <a16:creationId xmlns:a16="http://schemas.microsoft.com/office/drawing/2014/main" id="{5DD46791-D1BD-C3D1-20B3-17DE8A6C5F0E}"/>
               </a:ext>
             </a:extLst>
           </p:cNvPr>
@@ -3730,10 +5774,624 @@
           </a:p>
         </p:txBody>
       </p:sp>
+      <p:pic>
+        <p:nvPicPr>
+          <p:cNvPr id="4" name="Picture 3">
+            <a:extLst>
+              <a:ext uri="{FF2B5EF4-FFF2-40B4-BE49-F238E27FC236}">
+                <a16:creationId xmlns:a16="http://schemas.microsoft.com/office/drawing/2014/main" id="{34EEAC2E-6CB2-B92C-7857-977BD24C8444}"/>
+              </a:ext>
+            </a:extLst>
+          </p:cNvPr>
+          <p:cNvPicPr>
+            <a:picLocks noChangeAspect="1"/>
+          </p:cNvPicPr>
+          <p:nvPr/>
+        </p:nvPicPr>
+        <p:blipFill>
+          <a:blip r:embed="rId2"/>
+          <a:stretch>
+            <a:fillRect/>
+          </a:stretch>
+        </p:blipFill>
+        <p:spPr>
+          <a:xfrm>
+            <a:off x="2418064" y="0"/>
+            <a:ext cx="7355872" cy="6858000"/>
+          </a:xfrm>
+          <a:prstGeom prst="rect">
+            <a:avLst/>
+          </a:prstGeom>
+        </p:spPr>
+      </p:pic>
     </p:spTree>
     <p:extLst>
       <p:ext uri="{BB962C8B-B14F-4D97-AF65-F5344CB8AC3E}">
-        <p14:creationId xmlns:p14="http://schemas.microsoft.com/office/powerpoint/2010/main" val="616314994"/>
+        <p14:creationId xmlns:p14="http://schemas.microsoft.com/office/powerpoint/2010/main" val="1526551458"/>
+      </p:ext>
+    </p:extLst>
+  </p:cSld>
+  <p:clrMapOvr>
+    <a:masterClrMapping/>
+  </p:clrMapOvr>
+</p:sld>
+</file>
+
+<file path=ppt/slides/slide6.xml><?xml version="1.0" encoding="utf-8"?>
+<p:sld xmlns:a="http://schemas.openxmlformats.org/drawingml/2006/main" xmlns:r="http://schemas.openxmlformats.org/officeDocument/2006/relationships" xmlns:p="http://schemas.openxmlformats.org/presentationml/2006/main">
+  <p:cSld>
+    <p:spTree>
+      <p:nvGrpSpPr>
+        <p:cNvPr id="1" name="">
+          <a:extLst>
+            <a:ext uri="{FF2B5EF4-FFF2-40B4-BE49-F238E27FC236}">
+              <a16:creationId xmlns:a16="http://schemas.microsoft.com/office/drawing/2014/main" id="{CDFCEFBE-27A7-CDCC-72E9-6CE897E0874C}"/>
+            </a:ext>
+          </a:extLst>
+        </p:cNvPr>
+        <p:cNvGrpSpPr/>
+        <p:nvPr/>
+      </p:nvGrpSpPr>
+      <p:grpSpPr>
+        <a:xfrm>
+          <a:off x="0" y="0"/>
+          <a:ext cx="0" cy="0"/>
+          <a:chOff x="0" y="0"/>
+          <a:chExt cx="0" cy="0"/>
+        </a:xfrm>
+      </p:grpSpPr>
+      <p:sp>
+        <p:nvSpPr>
+          <p:cNvPr id="3" name="TextBox 2">
+            <a:extLst>
+              <a:ext uri="{FF2B5EF4-FFF2-40B4-BE49-F238E27FC236}">
+                <a16:creationId xmlns:a16="http://schemas.microsoft.com/office/drawing/2014/main" id="{050A1306-C093-8E63-D050-1E32B1B4279B}"/>
+              </a:ext>
+            </a:extLst>
+          </p:cNvPr>
+          <p:cNvSpPr txBox="1"/>
+          <p:nvPr/>
+        </p:nvSpPr>
+        <p:spPr>
+          <a:xfrm>
+            <a:off x="0" y="0"/>
+            <a:ext cx="12192000" cy="355354"/>
+          </a:xfrm>
+          <a:prstGeom prst="rect">
+            <a:avLst/>
+          </a:prstGeom>
+          <a:noFill/>
+        </p:spPr>
+        <p:txBody>
+          <a:bodyPr wrap="square">
+            <a:spAutoFit/>
+          </a:bodyPr>
+          <a:lstStyle/>
+          <a:p>
+            <a:pPr>
+              <a:lnSpc>
+                <a:spcPct val="150000"/>
+              </a:lnSpc>
+              <a:buNone/>
+            </a:pPr>
+            <a:r>
+              <a:rPr kumimoji="0" lang="en-US" altLang="en-US" sz="1300" b="0" i="0" u="none" strike="noStrike" cap="none" normalizeH="0" baseline="0">
+                <a:ln>
+                  <a:noFill/>
+                </a:ln>
+                <a:solidFill>
+                  <a:schemeClr val="tx1"/>
+                </a:solidFill>
+                <a:effectLst/>
+                <a:latin typeface="Arial" panose="020B0604020202020204" pitchFamily="34" charset="0"/>
+              </a:rPr>
+              <a:t>.</a:t>
+            </a:r>
+          </a:p>
+        </p:txBody>
+      </p:sp>
+      <p:pic>
+        <p:nvPicPr>
+          <p:cNvPr id="4" name="Picture 3">
+            <a:extLst>
+              <a:ext uri="{FF2B5EF4-FFF2-40B4-BE49-F238E27FC236}">
+                <a16:creationId xmlns:a16="http://schemas.microsoft.com/office/drawing/2014/main" id="{CEA43B22-5A09-2E45-7E05-97469671CDAF}"/>
+              </a:ext>
+            </a:extLst>
+          </p:cNvPr>
+          <p:cNvPicPr>
+            <a:picLocks noChangeAspect="1"/>
+          </p:cNvPicPr>
+          <p:nvPr/>
+        </p:nvPicPr>
+        <p:blipFill>
+          <a:blip r:embed="rId2"/>
+          <a:stretch>
+            <a:fillRect/>
+          </a:stretch>
+        </p:blipFill>
+        <p:spPr>
+          <a:xfrm>
+            <a:off x="0" y="1472181"/>
+            <a:ext cx="12192000" cy="3913638"/>
+          </a:xfrm>
+          <a:prstGeom prst="rect">
+            <a:avLst/>
+          </a:prstGeom>
+        </p:spPr>
+      </p:pic>
+    </p:spTree>
+    <p:extLst>
+      <p:ext uri="{BB962C8B-B14F-4D97-AF65-F5344CB8AC3E}">
+        <p14:creationId xmlns:p14="http://schemas.microsoft.com/office/powerpoint/2010/main" val="2453657036"/>
+      </p:ext>
+    </p:extLst>
+  </p:cSld>
+  <p:clrMapOvr>
+    <a:masterClrMapping/>
+  </p:clrMapOvr>
+</p:sld>
+</file>
+
+<file path=ppt/slides/slide7.xml><?xml version="1.0" encoding="utf-8"?>
+<p:sld xmlns:a="http://schemas.openxmlformats.org/drawingml/2006/main" xmlns:r="http://schemas.openxmlformats.org/officeDocument/2006/relationships" xmlns:p="http://schemas.openxmlformats.org/presentationml/2006/main">
+  <p:cSld>
+    <p:spTree>
+      <p:nvGrpSpPr>
+        <p:cNvPr id="1" name="">
+          <a:extLst>
+            <a:ext uri="{FF2B5EF4-FFF2-40B4-BE49-F238E27FC236}">
+              <a16:creationId xmlns:a16="http://schemas.microsoft.com/office/drawing/2014/main" id="{45AAC65B-2EBA-BA32-84CB-9F28C8FEE7AA}"/>
+            </a:ext>
+          </a:extLst>
+        </p:cNvPr>
+        <p:cNvGrpSpPr/>
+        <p:nvPr/>
+      </p:nvGrpSpPr>
+      <p:grpSpPr>
+        <a:xfrm>
+          <a:off x="0" y="0"/>
+          <a:ext cx="0" cy="0"/>
+          <a:chOff x="0" y="0"/>
+          <a:chExt cx="0" cy="0"/>
+        </a:xfrm>
+      </p:grpSpPr>
+      <p:sp>
+        <p:nvSpPr>
+          <p:cNvPr id="3" name="TextBox 2">
+            <a:extLst>
+              <a:ext uri="{FF2B5EF4-FFF2-40B4-BE49-F238E27FC236}">
+                <a16:creationId xmlns:a16="http://schemas.microsoft.com/office/drawing/2014/main" id="{73D39CAC-E4FB-DD81-9703-C3254EF2DA92}"/>
+              </a:ext>
+            </a:extLst>
+          </p:cNvPr>
+          <p:cNvSpPr txBox="1"/>
+          <p:nvPr/>
+        </p:nvSpPr>
+        <p:spPr>
+          <a:xfrm>
+            <a:off x="0" y="0"/>
+            <a:ext cx="12192000" cy="355354"/>
+          </a:xfrm>
+          <a:prstGeom prst="rect">
+            <a:avLst/>
+          </a:prstGeom>
+          <a:noFill/>
+        </p:spPr>
+        <p:txBody>
+          <a:bodyPr wrap="square">
+            <a:spAutoFit/>
+          </a:bodyPr>
+          <a:lstStyle/>
+          <a:p>
+            <a:pPr>
+              <a:lnSpc>
+                <a:spcPct val="150000"/>
+              </a:lnSpc>
+              <a:buNone/>
+            </a:pPr>
+            <a:r>
+              <a:rPr kumimoji="0" lang="en-US" altLang="en-US" sz="1300" b="0" i="0" u="none" strike="noStrike" cap="none" normalizeH="0" baseline="0">
+                <a:ln>
+                  <a:noFill/>
+                </a:ln>
+                <a:solidFill>
+                  <a:schemeClr val="tx1"/>
+                </a:solidFill>
+                <a:effectLst/>
+                <a:latin typeface="Arial" panose="020B0604020202020204" pitchFamily="34" charset="0"/>
+              </a:rPr>
+              <a:t>.</a:t>
+            </a:r>
+          </a:p>
+        </p:txBody>
+      </p:sp>
+      <p:pic>
+        <p:nvPicPr>
+          <p:cNvPr id="4" name="Picture 3">
+            <a:extLst>
+              <a:ext uri="{FF2B5EF4-FFF2-40B4-BE49-F238E27FC236}">
+                <a16:creationId xmlns:a16="http://schemas.microsoft.com/office/drawing/2014/main" id="{8FCF1149-2505-08E9-DFDB-5E0F8BB12D8C}"/>
+              </a:ext>
+            </a:extLst>
+          </p:cNvPr>
+          <p:cNvPicPr>
+            <a:picLocks noChangeAspect="1"/>
+          </p:cNvPicPr>
+          <p:nvPr/>
+        </p:nvPicPr>
+        <p:blipFill>
+          <a:blip r:embed="rId2"/>
+          <a:stretch>
+            <a:fillRect/>
+          </a:stretch>
+        </p:blipFill>
+        <p:spPr>
+          <a:xfrm>
+            <a:off x="0" y="0"/>
+            <a:ext cx="12192000" cy="4660336"/>
+          </a:xfrm>
+          <a:prstGeom prst="rect">
+            <a:avLst/>
+          </a:prstGeom>
+          <a:solidFill>
+            <a:srgbClr val="FFFFFF">
+              <a:shade val="85000"/>
+            </a:srgbClr>
+          </a:solidFill>
+          <a:ln w="88900" cap="sq">
+            <a:solidFill>
+              <a:srgbClr val="FFFFFF"/>
+            </a:solidFill>
+            <a:miter lim="800000"/>
+          </a:ln>
+          <a:effectLst>
+            <a:outerShdw blurRad="55000" dist="18000" dir="5400000" algn="tl" rotWithShape="0">
+              <a:srgbClr val="000000">
+                <a:alpha val="40000"/>
+              </a:srgbClr>
+            </a:outerShdw>
+          </a:effectLst>
+          <a:scene3d>
+            <a:camera prst="orthographicFront"/>
+            <a:lightRig rig="twoPt" dir="t">
+              <a:rot lat="0" lon="0" rev="7200000"/>
+            </a:lightRig>
+          </a:scene3d>
+          <a:sp3d>
+            <a:bevelT w="25400" h="19050"/>
+            <a:contourClr>
+              <a:srgbClr val="FFFFFF"/>
+            </a:contourClr>
+          </a:sp3d>
+        </p:spPr>
+      </p:pic>
+      <p:pic>
+        <p:nvPicPr>
+          <p:cNvPr id="6" name="Picture 5">
+            <a:extLst>
+              <a:ext uri="{FF2B5EF4-FFF2-40B4-BE49-F238E27FC236}">
+                <a16:creationId xmlns:a16="http://schemas.microsoft.com/office/drawing/2014/main" id="{A68AA7C2-F35E-00E7-BB8C-1BAF33C96D4A}"/>
+              </a:ext>
+            </a:extLst>
+          </p:cNvPr>
+          <p:cNvPicPr>
+            <a:picLocks noChangeAspect="1"/>
+          </p:cNvPicPr>
+          <p:nvPr/>
+        </p:nvPicPr>
+        <p:blipFill>
+          <a:blip r:embed="rId3"/>
+          <a:stretch>
+            <a:fillRect/>
+          </a:stretch>
+        </p:blipFill>
+        <p:spPr>
+          <a:xfrm>
+            <a:off x="0" y="4981819"/>
+            <a:ext cx="12192000" cy="1876181"/>
+          </a:xfrm>
+          <a:prstGeom prst="rect">
+            <a:avLst/>
+          </a:prstGeom>
+          <a:solidFill>
+            <a:srgbClr val="FFFFFF">
+              <a:shade val="85000"/>
+            </a:srgbClr>
+          </a:solidFill>
+          <a:ln w="88900" cap="sq">
+            <a:solidFill>
+              <a:srgbClr val="FFFFFF"/>
+            </a:solidFill>
+            <a:miter lim="800000"/>
+          </a:ln>
+          <a:effectLst>
+            <a:outerShdw blurRad="55000" dist="18000" dir="5400000" algn="tl" rotWithShape="0">
+              <a:srgbClr val="000000">
+                <a:alpha val="40000"/>
+              </a:srgbClr>
+            </a:outerShdw>
+          </a:effectLst>
+          <a:scene3d>
+            <a:camera prst="orthographicFront"/>
+            <a:lightRig rig="twoPt" dir="t">
+              <a:rot lat="0" lon="0" rev="7200000"/>
+            </a:lightRig>
+          </a:scene3d>
+          <a:sp3d>
+            <a:bevelT w="25400" h="19050"/>
+            <a:contourClr>
+              <a:srgbClr val="FFFFFF"/>
+            </a:contourClr>
+          </a:sp3d>
+        </p:spPr>
+      </p:pic>
+    </p:spTree>
+    <p:extLst>
+      <p:ext uri="{BB962C8B-B14F-4D97-AF65-F5344CB8AC3E}">
+        <p14:creationId xmlns:p14="http://schemas.microsoft.com/office/powerpoint/2010/main" val="3903661007"/>
+      </p:ext>
+    </p:extLst>
+  </p:cSld>
+  <p:clrMapOvr>
+    <a:masterClrMapping/>
+  </p:clrMapOvr>
+</p:sld>
+</file>
+
+<file path=ppt/slides/slide8.xml><?xml version="1.0" encoding="utf-8"?>
+<p:sld xmlns:a="http://schemas.openxmlformats.org/drawingml/2006/main" xmlns:r="http://schemas.openxmlformats.org/officeDocument/2006/relationships" xmlns:p="http://schemas.openxmlformats.org/presentationml/2006/main">
+  <p:cSld>
+    <p:spTree>
+      <p:nvGrpSpPr>
+        <p:cNvPr id="1" name="">
+          <a:extLst>
+            <a:ext uri="{FF2B5EF4-FFF2-40B4-BE49-F238E27FC236}">
+              <a16:creationId xmlns:a16="http://schemas.microsoft.com/office/drawing/2014/main" id="{A0B4AA32-F2EA-A55A-7891-1DF71A6E8F4E}"/>
+            </a:ext>
+          </a:extLst>
+        </p:cNvPr>
+        <p:cNvGrpSpPr/>
+        <p:nvPr/>
+      </p:nvGrpSpPr>
+      <p:grpSpPr>
+        <a:xfrm>
+          <a:off x="0" y="0"/>
+          <a:ext cx="0" cy="0"/>
+          <a:chOff x="0" y="0"/>
+          <a:chExt cx="0" cy="0"/>
+        </a:xfrm>
+      </p:grpSpPr>
+      <p:sp>
+        <p:nvSpPr>
+          <p:cNvPr id="3" name="TextBox 2">
+            <a:extLst>
+              <a:ext uri="{FF2B5EF4-FFF2-40B4-BE49-F238E27FC236}">
+                <a16:creationId xmlns:a16="http://schemas.microsoft.com/office/drawing/2014/main" id="{5B9F8F8D-3C34-6C8D-1378-21E3CDABD1C3}"/>
+              </a:ext>
+            </a:extLst>
+          </p:cNvPr>
+          <p:cNvSpPr txBox="1"/>
+          <p:nvPr/>
+        </p:nvSpPr>
+        <p:spPr>
+          <a:xfrm>
+            <a:off x="0" y="0"/>
+            <a:ext cx="12192000" cy="355354"/>
+          </a:xfrm>
+          <a:prstGeom prst="rect">
+            <a:avLst/>
+          </a:prstGeom>
+          <a:noFill/>
+        </p:spPr>
+        <p:txBody>
+          <a:bodyPr wrap="square">
+            <a:spAutoFit/>
+          </a:bodyPr>
+          <a:lstStyle/>
+          <a:p>
+            <a:pPr>
+              <a:lnSpc>
+                <a:spcPct val="150000"/>
+              </a:lnSpc>
+              <a:buNone/>
+            </a:pPr>
+            <a:r>
+              <a:rPr kumimoji="0" lang="en-US" altLang="en-US" sz="1300" b="0" i="0" u="none" strike="noStrike" cap="none" normalizeH="0" baseline="0">
+                <a:ln>
+                  <a:noFill/>
+                </a:ln>
+                <a:solidFill>
+                  <a:schemeClr val="tx1"/>
+                </a:solidFill>
+                <a:effectLst/>
+                <a:latin typeface="Arial" panose="020B0604020202020204" pitchFamily="34" charset="0"/>
+              </a:rPr>
+              <a:t>.</a:t>
+            </a:r>
+          </a:p>
+        </p:txBody>
+      </p:sp>
+      <p:pic>
+        <p:nvPicPr>
+          <p:cNvPr id="4" name="Picture 3">
+            <a:extLst>
+              <a:ext uri="{FF2B5EF4-FFF2-40B4-BE49-F238E27FC236}">
+                <a16:creationId xmlns:a16="http://schemas.microsoft.com/office/drawing/2014/main" id="{2F326726-CC60-0277-1088-FA93D5A641C8}"/>
+              </a:ext>
+            </a:extLst>
+          </p:cNvPr>
+          <p:cNvPicPr>
+            <a:picLocks noChangeAspect="1"/>
+          </p:cNvPicPr>
+          <p:nvPr/>
+        </p:nvPicPr>
+        <p:blipFill>
+          <a:blip r:embed="rId2"/>
+          <a:stretch>
+            <a:fillRect/>
+          </a:stretch>
+        </p:blipFill>
+        <p:spPr>
+          <a:xfrm>
+            <a:off x="746966" y="409153"/>
+            <a:ext cx="10698068" cy="6039693"/>
+          </a:xfrm>
+          <a:prstGeom prst="rect">
+            <a:avLst/>
+          </a:prstGeom>
+          <a:solidFill>
+            <a:srgbClr val="FFFFFF">
+              <a:shade val="85000"/>
+            </a:srgbClr>
+          </a:solidFill>
+          <a:ln w="88900" cap="sq">
+            <a:solidFill>
+              <a:srgbClr val="FFFFFF"/>
+            </a:solidFill>
+            <a:miter lim="800000"/>
+          </a:ln>
+          <a:effectLst>
+            <a:outerShdw blurRad="55000" dist="18000" dir="5400000" algn="tl" rotWithShape="0">
+              <a:srgbClr val="000000">
+                <a:alpha val="40000"/>
+              </a:srgbClr>
+            </a:outerShdw>
+          </a:effectLst>
+          <a:scene3d>
+            <a:camera prst="orthographicFront"/>
+            <a:lightRig rig="twoPt" dir="t">
+              <a:rot lat="0" lon="0" rev="7200000"/>
+            </a:lightRig>
+          </a:scene3d>
+          <a:sp3d>
+            <a:bevelT w="25400" h="19050"/>
+            <a:contourClr>
+              <a:srgbClr val="FFFFFF"/>
+            </a:contourClr>
+          </a:sp3d>
+        </p:spPr>
+      </p:pic>
+    </p:spTree>
+    <p:extLst>
+      <p:ext uri="{BB962C8B-B14F-4D97-AF65-F5344CB8AC3E}">
+        <p14:creationId xmlns:p14="http://schemas.microsoft.com/office/powerpoint/2010/main" val="1358783846"/>
+      </p:ext>
+    </p:extLst>
+  </p:cSld>
+  <p:clrMapOvr>
+    <a:masterClrMapping/>
+  </p:clrMapOvr>
+</p:sld>
+</file>
+
+<file path=ppt/slides/slide9.xml><?xml version="1.0" encoding="utf-8"?>
+<p:sld xmlns:a="http://schemas.openxmlformats.org/drawingml/2006/main" xmlns:r="http://schemas.openxmlformats.org/officeDocument/2006/relationships" xmlns:p="http://schemas.openxmlformats.org/presentationml/2006/main">
+  <p:cSld>
+    <p:spTree>
+      <p:nvGrpSpPr>
+        <p:cNvPr id="1" name="">
+          <a:extLst>
+            <a:ext uri="{FF2B5EF4-FFF2-40B4-BE49-F238E27FC236}">
+              <a16:creationId xmlns:a16="http://schemas.microsoft.com/office/drawing/2014/main" id="{AAD33A1D-14FA-D3AF-C6B9-64241679026E}"/>
+            </a:ext>
+          </a:extLst>
+        </p:cNvPr>
+        <p:cNvGrpSpPr/>
+        <p:nvPr/>
+      </p:nvGrpSpPr>
+      <p:grpSpPr>
+        <a:xfrm>
+          <a:off x="0" y="0"/>
+          <a:ext cx="0" cy="0"/>
+          <a:chOff x="0" y="0"/>
+          <a:chExt cx="0" cy="0"/>
+        </a:xfrm>
+      </p:grpSpPr>
+      <p:sp>
+        <p:nvSpPr>
+          <p:cNvPr id="3" name="TextBox 2">
+            <a:extLst>
+              <a:ext uri="{FF2B5EF4-FFF2-40B4-BE49-F238E27FC236}">
+                <a16:creationId xmlns:a16="http://schemas.microsoft.com/office/drawing/2014/main" id="{48F6D595-6AF8-C6ED-F5C9-16A0AB87100E}"/>
+              </a:ext>
+            </a:extLst>
+          </p:cNvPr>
+          <p:cNvSpPr txBox="1"/>
+          <p:nvPr/>
+        </p:nvSpPr>
+        <p:spPr>
+          <a:xfrm>
+            <a:off x="0" y="0"/>
+            <a:ext cx="12192000" cy="355354"/>
+          </a:xfrm>
+          <a:prstGeom prst="rect">
+            <a:avLst/>
+          </a:prstGeom>
+          <a:noFill/>
+        </p:spPr>
+        <p:txBody>
+          <a:bodyPr wrap="square">
+            <a:spAutoFit/>
+          </a:bodyPr>
+          <a:lstStyle/>
+          <a:p>
+            <a:pPr>
+              <a:lnSpc>
+                <a:spcPct val="150000"/>
+              </a:lnSpc>
+              <a:buNone/>
+            </a:pPr>
+            <a:r>
+              <a:rPr kumimoji="0" lang="en-US" altLang="en-US" sz="1300" b="0" i="0" u="none" strike="noStrike" cap="none" normalizeH="0" baseline="0">
+                <a:ln>
+                  <a:noFill/>
+                </a:ln>
+                <a:solidFill>
+                  <a:schemeClr val="tx1"/>
+                </a:solidFill>
+                <a:effectLst/>
+                <a:latin typeface="Arial" panose="020B0604020202020204" pitchFamily="34" charset="0"/>
+              </a:rPr>
+              <a:t>.</a:t>
+            </a:r>
+          </a:p>
+        </p:txBody>
+      </p:sp>
+      <p:pic>
+        <p:nvPicPr>
+          <p:cNvPr id="4" name="Picture 3">
+            <a:extLst>
+              <a:ext uri="{FF2B5EF4-FFF2-40B4-BE49-F238E27FC236}">
+                <a16:creationId xmlns:a16="http://schemas.microsoft.com/office/drawing/2014/main" id="{FBD572C4-823D-831C-C5AA-F79B966D9E08}"/>
+              </a:ext>
+            </a:extLst>
+          </p:cNvPr>
+          <p:cNvPicPr>
+            <a:picLocks noChangeAspect="1"/>
+          </p:cNvPicPr>
+          <p:nvPr/>
+        </p:nvPicPr>
+        <p:blipFill>
+          <a:blip r:embed="rId2"/>
+          <a:stretch>
+            <a:fillRect/>
+          </a:stretch>
+        </p:blipFill>
+        <p:spPr>
+          <a:xfrm>
+            <a:off x="1919429" y="0"/>
+            <a:ext cx="8353142" cy="6858000"/>
+          </a:xfrm>
+          <a:prstGeom prst="rect">
+            <a:avLst/>
+          </a:prstGeom>
+        </p:spPr>
+      </p:pic>
+    </p:spTree>
+    <p:extLst>
+      <p:ext uri="{BB962C8B-B14F-4D97-AF65-F5344CB8AC3E}">
+        <p14:creationId xmlns:p14="http://schemas.microsoft.com/office/powerpoint/2010/main" val="409513484"/>
       </p:ext>
     </p:extLst>
   </p:cSld>
